--- a/slides_editable.pptx
+++ b/slides_editable.pptx
@@ -5,19 +5,19 @@
     <p:sldMasterId id="2147483648" r:id="rId1"/>
   </p:sldMasterIdLst>
   <p:sldIdLst>
-    <p:sldId id="256" r:id="rId7"/>
-    <p:sldId id="257" r:id="rId8"/>
-    <p:sldId id="258" r:id="rId9"/>
-    <p:sldId id="259" r:id="rId10"/>
-    <p:sldId id="260" r:id="rId11"/>
-    <p:sldId id="261" r:id="rId12"/>
-    <p:sldId id="262" r:id="rId13"/>
-    <p:sldId id="263" r:id="rId14"/>
-    <p:sldId id="264" r:id="rId15"/>
-    <p:sldId id="265" r:id="rId16"/>
-    <p:sldId id="266" r:id="rId17"/>
+    <p:sldId id="256" r:id="rId2"/>
+    <p:sldId id="257" r:id="rId3"/>
+    <p:sldId id="258" r:id="rId4"/>
+    <p:sldId id="259" r:id="rId5"/>
+    <p:sldId id="260" r:id="rId6"/>
+    <p:sldId id="261" r:id="rId7"/>
+    <p:sldId id="262" r:id="rId8"/>
+    <p:sldId id="263" r:id="rId9"/>
+    <p:sldId id="264" r:id="rId10"/>
+    <p:sldId id="265" r:id="rId11"/>
+    <p:sldId id="266" r:id="rId12"/>
   </p:sldIdLst>
-  <p:sldSz cx="12191999" cy="6858000" type="screen4x3"/>
+  <p:sldSz cx="12192000" cy="6858000"/>
   <p:notesSz cx="6858000" cy="9144000"/>
   <p:defaultTextStyle>
     <a:defPPr>
@@ -114,6 +114,22 @@
       </a:defRPr>
     </a:lvl9pPr>
   </p:defaultTextStyle>
+  <p:extLst>
+    <p:ext uri="{EFAFB233-063F-42B5-8137-9DF3F51BA10A}">
+      <p15:sldGuideLst xmlns:p15="http://schemas.microsoft.com/office/powerpoint/2012/main">
+        <p15:guide id="1" orient="horz" pos="2160">
+          <p15:clr>
+            <a:srgbClr val="A4A3A4"/>
+          </p15:clr>
+        </p15:guide>
+        <p15:guide id="2" pos="2880">
+          <p15:clr>
+            <a:srgbClr val="A4A3A4"/>
+          </p15:clr>
+        </p15:guide>
+      </p15:sldGuideLst>
+    </p:ext>
+  </p:extLst>
 </p:presentation>
 </file>
 
@@ -155,10 +171,9 @@
           <a:lstStyle/>
           <a:p>
             <a:r>
-              <a:rPr lang="en-US" smtClean="0"/>
+              <a:rPr lang="en-US"/>
               <a:t>Click to edit Master title style</a:t>
             </a:r>
-            <a:endParaRPr lang="en-US"/>
           </a:p>
         </p:txBody>
       </p:sp>
@@ -274,10 +289,9 @@
           </a:lstStyle>
           <a:p>
             <a:r>
-              <a:rPr lang="en-US" smtClean="0"/>
+              <a:rPr lang="en-US"/>
               <a:t>Click to edit Master subtitle style</a:t>
             </a:r>
-            <a:endParaRPr lang="en-US"/>
           </a:p>
         </p:txBody>
       </p:sp>
@@ -298,7 +312,7 @@
           <a:p>
             <a:fld id="{5BCAD085-E8A6-8845-BD4E-CB4CCA059FC4}" type="datetimeFigureOut">
               <a:rPr lang="en-US" smtClean="0"/>
-              <a:t>1/27/13</a:t>
+              <a:t>5/24/2026</a:t>
             </a:fld>
             <a:endParaRPr lang="en-US"/>
           </a:p>
@@ -392,10 +406,9 @@
           <a:lstStyle/>
           <a:p>
             <a:r>
-              <a:rPr lang="en-US" smtClean="0"/>
+              <a:rPr lang="en-US"/>
               <a:t>Click to edit Master title style</a:t>
             </a:r>
-            <a:endParaRPr lang="en-US"/>
           </a:p>
         </p:txBody>
       </p:sp>
@@ -416,38 +429,37 @@
           <a:p>
             <a:pPr lvl="0"/>
             <a:r>
-              <a:rPr lang="en-US" smtClean="0"/>
+              <a:rPr lang="en-US"/>
               <a:t>Click to edit Master text styles</a:t>
             </a:r>
           </a:p>
           <a:p>
             <a:pPr lvl="1"/>
             <a:r>
-              <a:rPr lang="en-US" smtClean="0"/>
+              <a:rPr lang="en-US"/>
               <a:t>Second level</a:t>
             </a:r>
           </a:p>
           <a:p>
             <a:pPr lvl="2"/>
             <a:r>
-              <a:rPr lang="en-US" smtClean="0"/>
+              <a:rPr lang="en-US"/>
               <a:t>Third level</a:t>
             </a:r>
           </a:p>
           <a:p>
             <a:pPr lvl="3"/>
             <a:r>
-              <a:rPr lang="en-US" smtClean="0"/>
+              <a:rPr lang="en-US"/>
               <a:t>Fourth level</a:t>
             </a:r>
           </a:p>
           <a:p>
             <a:pPr lvl="4"/>
             <a:r>
-              <a:rPr lang="en-US" smtClean="0"/>
+              <a:rPr lang="en-US"/>
               <a:t>Fifth level</a:t>
             </a:r>
-            <a:endParaRPr lang="en-US"/>
           </a:p>
         </p:txBody>
       </p:sp>
@@ -468,7 +480,7 @@
           <a:p>
             <a:fld id="{5BCAD085-E8A6-8845-BD4E-CB4CCA059FC4}" type="datetimeFigureOut">
               <a:rPr lang="en-US" smtClean="0"/>
-              <a:t>1/27/13</a:t>
+              <a:t>5/24/2026</a:t>
             </a:fld>
             <a:endParaRPr lang="en-US"/>
           </a:p>
@@ -567,10 +579,9 @@
           <a:lstStyle/>
           <a:p>
             <a:r>
-              <a:rPr lang="en-US" smtClean="0"/>
+              <a:rPr lang="en-US"/>
               <a:t>Click to edit Master title style</a:t>
             </a:r>
-            <a:endParaRPr lang="en-US"/>
           </a:p>
         </p:txBody>
       </p:sp>
@@ -596,38 +607,37 @@
           <a:p>
             <a:pPr lvl="0"/>
             <a:r>
-              <a:rPr lang="en-US" smtClean="0"/>
+              <a:rPr lang="en-US"/>
               <a:t>Click to edit Master text styles</a:t>
             </a:r>
           </a:p>
           <a:p>
             <a:pPr lvl="1"/>
             <a:r>
-              <a:rPr lang="en-US" smtClean="0"/>
+              <a:rPr lang="en-US"/>
               <a:t>Second level</a:t>
             </a:r>
           </a:p>
           <a:p>
             <a:pPr lvl="2"/>
             <a:r>
-              <a:rPr lang="en-US" smtClean="0"/>
+              <a:rPr lang="en-US"/>
               <a:t>Third level</a:t>
             </a:r>
           </a:p>
           <a:p>
             <a:pPr lvl="3"/>
             <a:r>
-              <a:rPr lang="en-US" smtClean="0"/>
+              <a:rPr lang="en-US"/>
               <a:t>Fourth level</a:t>
             </a:r>
           </a:p>
           <a:p>
             <a:pPr lvl="4"/>
             <a:r>
-              <a:rPr lang="en-US" smtClean="0"/>
+              <a:rPr lang="en-US"/>
               <a:t>Fifth level</a:t>
             </a:r>
-            <a:endParaRPr lang="en-US"/>
           </a:p>
         </p:txBody>
       </p:sp>
@@ -648,7 +658,7 @@
           <a:p>
             <a:fld id="{5BCAD085-E8A6-8845-BD4E-CB4CCA059FC4}" type="datetimeFigureOut">
               <a:rPr lang="en-US" smtClean="0"/>
-              <a:t>1/27/13</a:t>
+              <a:t>5/24/2026</a:t>
             </a:fld>
             <a:endParaRPr lang="en-US"/>
           </a:p>
@@ -742,10 +752,9 @@
           <a:lstStyle/>
           <a:p>
             <a:r>
-              <a:rPr lang="en-US" smtClean="0"/>
+              <a:rPr lang="en-US"/>
               <a:t>Click to edit Master title style</a:t>
             </a:r>
-            <a:endParaRPr lang="en-US"/>
           </a:p>
         </p:txBody>
       </p:sp>
@@ -766,38 +775,37 @@
           <a:p>
             <a:pPr lvl="0"/>
             <a:r>
-              <a:rPr lang="en-US" smtClean="0"/>
+              <a:rPr lang="en-US"/>
               <a:t>Click to edit Master text styles</a:t>
             </a:r>
           </a:p>
           <a:p>
             <a:pPr lvl="1"/>
             <a:r>
-              <a:rPr lang="en-US" smtClean="0"/>
+              <a:rPr lang="en-US"/>
               <a:t>Second level</a:t>
             </a:r>
           </a:p>
           <a:p>
             <a:pPr lvl="2"/>
             <a:r>
-              <a:rPr lang="en-US" smtClean="0"/>
+              <a:rPr lang="en-US"/>
               <a:t>Third level</a:t>
             </a:r>
           </a:p>
           <a:p>
             <a:pPr lvl="3"/>
             <a:r>
-              <a:rPr lang="en-US" smtClean="0"/>
+              <a:rPr lang="en-US"/>
               <a:t>Fourth level</a:t>
             </a:r>
           </a:p>
           <a:p>
             <a:pPr lvl="4"/>
             <a:r>
-              <a:rPr lang="en-US" smtClean="0"/>
+              <a:rPr lang="en-US"/>
               <a:t>Fifth level</a:t>
             </a:r>
-            <a:endParaRPr lang="en-US"/>
           </a:p>
         </p:txBody>
       </p:sp>
@@ -818,7 +826,7 @@
           <a:p>
             <a:fld id="{5BCAD085-E8A6-8845-BD4E-CB4CCA059FC4}" type="datetimeFigureOut">
               <a:rPr lang="en-US" smtClean="0"/>
-              <a:t>1/27/13</a:t>
+              <a:t>5/24/2026</a:t>
             </a:fld>
             <a:endParaRPr lang="en-US"/>
           </a:p>
@@ -921,10 +929,9 @@
           </a:lstStyle>
           <a:p>
             <a:r>
-              <a:rPr lang="en-US" smtClean="0"/>
+              <a:rPr lang="en-US"/>
               <a:t>Click to edit Master title style</a:t>
             </a:r>
-            <a:endParaRPr lang="en-US"/>
           </a:p>
         </p:txBody>
       </p:sp>
@@ -1041,7 +1048,7 @@
           <a:p>
             <a:pPr lvl="0"/>
             <a:r>
-              <a:rPr lang="en-US" smtClean="0"/>
+              <a:rPr lang="en-US"/>
               <a:t>Click to edit Master text styles</a:t>
             </a:r>
           </a:p>
@@ -1064,7 +1071,7 @@
           <a:p>
             <a:fld id="{5BCAD085-E8A6-8845-BD4E-CB4CCA059FC4}" type="datetimeFigureOut">
               <a:rPr lang="en-US" smtClean="0"/>
-              <a:t>1/27/13</a:t>
+              <a:t>5/24/2026</a:t>
             </a:fld>
             <a:endParaRPr lang="en-US"/>
           </a:p>
@@ -1158,10 +1165,9 @@
           <a:lstStyle/>
           <a:p>
             <a:r>
-              <a:rPr lang="en-US" smtClean="0"/>
+              <a:rPr lang="en-US"/>
               <a:t>Click to edit Master title style</a:t>
             </a:r>
-            <a:endParaRPr lang="en-US"/>
           </a:p>
         </p:txBody>
       </p:sp>
@@ -1215,38 +1221,37 @@
           <a:p>
             <a:pPr lvl="0"/>
             <a:r>
-              <a:rPr lang="en-US" smtClean="0"/>
+              <a:rPr lang="en-US"/>
               <a:t>Click to edit Master text styles</a:t>
             </a:r>
           </a:p>
           <a:p>
             <a:pPr lvl="1"/>
             <a:r>
-              <a:rPr lang="en-US" smtClean="0"/>
+              <a:rPr lang="en-US"/>
               <a:t>Second level</a:t>
             </a:r>
           </a:p>
           <a:p>
             <a:pPr lvl="2"/>
             <a:r>
-              <a:rPr lang="en-US" smtClean="0"/>
+              <a:rPr lang="en-US"/>
               <a:t>Third level</a:t>
             </a:r>
           </a:p>
           <a:p>
             <a:pPr lvl="3"/>
             <a:r>
-              <a:rPr lang="en-US" smtClean="0"/>
+              <a:rPr lang="en-US"/>
               <a:t>Fourth level</a:t>
             </a:r>
           </a:p>
           <a:p>
             <a:pPr lvl="4"/>
             <a:r>
-              <a:rPr lang="en-US" smtClean="0"/>
+              <a:rPr lang="en-US"/>
               <a:t>Fifth level</a:t>
             </a:r>
-            <a:endParaRPr lang="en-US"/>
           </a:p>
         </p:txBody>
       </p:sp>
@@ -1300,38 +1305,37 @@
           <a:p>
             <a:pPr lvl="0"/>
             <a:r>
-              <a:rPr lang="en-US" smtClean="0"/>
+              <a:rPr lang="en-US"/>
               <a:t>Click to edit Master text styles</a:t>
             </a:r>
           </a:p>
           <a:p>
             <a:pPr lvl="1"/>
             <a:r>
-              <a:rPr lang="en-US" smtClean="0"/>
+              <a:rPr lang="en-US"/>
               <a:t>Second level</a:t>
             </a:r>
           </a:p>
           <a:p>
             <a:pPr lvl="2"/>
             <a:r>
-              <a:rPr lang="en-US" smtClean="0"/>
+              <a:rPr lang="en-US"/>
               <a:t>Third level</a:t>
             </a:r>
           </a:p>
           <a:p>
             <a:pPr lvl="3"/>
             <a:r>
-              <a:rPr lang="en-US" smtClean="0"/>
+              <a:rPr lang="en-US"/>
               <a:t>Fourth level</a:t>
             </a:r>
           </a:p>
           <a:p>
             <a:pPr lvl="4"/>
             <a:r>
-              <a:rPr lang="en-US" smtClean="0"/>
+              <a:rPr lang="en-US"/>
               <a:t>Fifth level</a:t>
             </a:r>
-            <a:endParaRPr lang="en-US"/>
           </a:p>
         </p:txBody>
       </p:sp>
@@ -1352,7 +1356,7 @@
           <a:p>
             <a:fld id="{5BCAD085-E8A6-8845-BD4E-CB4CCA059FC4}" type="datetimeFigureOut">
               <a:rPr lang="en-US" smtClean="0"/>
-              <a:t>1/27/13</a:t>
+              <a:t>5/24/2026</a:t>
             </a:fld>
             <a:endParaRPr lang="en-US"/>
           </a:p>
@@ -1450,10 +1454,9 @@
           </a:lstStyle>
           <a:p>
             <a:r>
-              <a:rPr lang="en-US" smtClean="0"/>
+              <a:rPr lang="en-US"/>
               <a:t>Click to edit Master title style</a:t>
             </a:r>
-            <a:endParaRPr lang="en-US"/>
           </a:p>
         </p:txBody>
       </p:sp>
@@ -1516,7 +1519,7 @@
           <a:p>
             <a:pPr lvl="0"/>
             <a:r>
-              <a:rPr lang="en-US" smtClean="0"/>
+              <a:rPr lang="en-US"/>
               <a:t>Click to edit Master text styles</a:t>
             </a:r>
           </a:p>
@@ -1572,38 +1575,37 @@
           <a:p>
             <a:pPr lvl="0"/>
             <a:r>
-              <a:rPr lang="en-US" smtClean="0"/>
+              <a:rPr lang="en-US"/>
               <a:t>Click to edit Master text styles</a:t>
             </a:r>
           </a:p>
           <a:p>
             <a:pPr lvl="1"/>
             <a:r>
-              <a:rPr lang="en-US" smtClean="0"/>
+              <a:rPr lang="en-US"/>
               <a:t>Second level</a:t>
             </a:r>
           </a:p>
           <a:p>
             <a:pPr lvl="2"/>
             <a:r>
-              <a:rPr lang="en-US" smtClean="0"/>
+              <a:rPr lang="en-US"/>
               <a:t>Third level</a:t>
             </a:r>
           </a:p>
           <a:p>
             <a:pPr lvl="3"/>
             <a:r>
-              <a:rPr lang="en-US" smtClean="0"/>
+              <a:rPr lang="en-US"/>
               <a:t>Fourth level</a:t>
             </a:r>
           </a:p>
           <a:p>
             <a:pPr lvl="4"/>
             <a:r>
-              <a:rPr lang="en-US" smtClean="0"/>
+              <a:rPr lang="en-US"/>
               <a:t>Fifth level</a:t>
             </a:r>
-            <a:endParaRPr lang="en-US"/>
           </a:p>
         </p:txBody>
       </p:sp>
@@ -1666,7 +1668,7 @@
           <a:p>
             <a:pPr lvl="0"/>
             <a:r>
-              <a:rPr lang="en-US" smtClean="0"/>
+              <a:rPr lang="en-US"/>
               <a:t>Click to edit Master text styles</a:t>
             </a:r>
           </a:p>
@@ -1722,38 +1724,37 @@
           <a:p>
             <a:pPr lvl="0"/>
             <a:r>
-              <a:rPr lang="en-US" smtClean="0"/>
+              <a:rPr lang="en-US"/>
               <a:t>Click to edit Master text styles</a:t>
             </a:r>
           </a:p>
           <a:p>
             <a:pPr lvl="1"/>
             <a:r>
-              <a:rPr lang="en-US" smtClean="0"/>
+              <a:rPr lang="en-US"/>
               <a:t>Second level</a:t>
             </a:r>
           </a:p>
           <a:p>
             <a:pPr lvl="2"/>
             <a:r>
-              <a:rPr lang="en-US" smtClean="0"/>
+              <a:rPr lang="en-US"/>
               <a:t>Third level</a:t>
             </a:r>
           </a:p>
           <a:p>
             <a:pPr lvl="3"/>
             <a:r>
-              <a:rPr lang="en-US" smtClean="0"/>
+              <a:rPr lang="en-US"/>
               <a:t>Fourth level</a:t>
             </a:r>
           </a:p>
           <a:p>
             <a:pPr lvl="4"/>
             <a:r>
-              <a:rPr lang="en-US" smtClean="0"/>
+              <a:rPr lang="en-US"/>
               <a:t>Fifth level</a:t>
             </a:r>
-            <a:endParaRPr lang="en-US"/>
           </a:p>
         </p:txBody>
       </p:sp>
@@ -1774,7 +1775,7 @@
           <a:p>
             <a:fld id="{5BCAD085-E8A6-8845-BD4E-CB4CCA059FC4}" type="datetimeFigureOut">
               <a:rPr lang="en-US" smtClean="0"/>
-              <a:t>1/27/13</a:t>
+              <a:t>5/24/2026</a:t>
             </a:fld>
             <a:endParaRPr lang="en-US"/>
           </a:p>
@@ -1868,10 +1869,9 @@
           <a:lstStyle/>
           <a:p>
             <a:r>
-              <a:rPr lang="en-US" smtClean="0"/>
+              <a:rPr lang="en-US"/>
               <a:t>Click to edit Master title style</a:t>
             </a:r>
-            <a:endParaRPr lang="en-US"/>
           </a:p>
         </p:txBody>
       </p:sp>
@@ -1892,7 +1892,7 @@
           <a:p>
             <a:fld id="{5BCAD085-E8A6-8845-BD4E-CB4CCA059FC4}" type="datetimeFigureOut">
               <a:rPr lang="en-US" smtClean="0"/>
-              <a:t>1/27/13</a:t>
+              <a:t>5/24/2026</a:t>
             </a:fld>
             <a:endParaRPr lang="en-US"/>
           </a:p>
@@ -1987,7 +1987,7 @@
           <a:p>
             <a:fld id="{5BCAD085-E8A6-8845-BD4E-CB4CCA059FC4}" type="datetimeFigureOut">
               <a:rPr lang="en-US" smtClean="0"/>
-              <a:t>1/27/13</a:t>
+              <a:t>5/24/2026</a:t>
             </a:fld>
             <a:endParaRPr lang="en-US"/>
           </a:p>
@@ -2090,10 +2090,9 @@
           </a:lstStyle>
           <a:p>
             <a:r>
-              <a:rPr lang="en-US" smtClean="0"/>
+              <a:rPr lang="en-US"/>
               <a:t>Click to edit Master title style</a:t>
             </a:r>
-            <a:endParaRPr lang="en-US"/>
           </a:p>
         </p:txBody>
       </p:sp>
@@ -2147,38 +2146,37 @@
           <a:p>
             <a:pPr lvl="0"/>
             <a:r>
-              <a:rPr lang="en-US" smtClean="0"/>
+              <a:rPr lang="en-US"/>
               <a:t>Click to edit Master text styles</a:t>
             </a:r>
           </a:p>
           <a:p>
             <a:pPr lvl="1"/>
             <a:r>
-              <a:rPr lang="en-US" smtClean="0"/>
+              <a:rPr lang="en-US"/>
               <a:t>Second level</a:t>
             </a:r>
           </a:p>
           <a:p>
             <a:pPr lvl="2"/>
             <a:r>
-              <a:rPr lang="en-US" smtClean="0"/>
+              <a:rPr lang="en-US"/>
               <a:t>Third level</a:t>
             </a:r>
           </a:p>
           <a:p>
             <a:pPr lvl="3"/>
             <a:r>
-              <a:rPr lang="en-US" smtClean="0"/>
+              <a:rPr lang="en-US"/>
               <a:t>Fourth level</a:t>
             </a:r>
           </a:p>
           <a:p>
             <a:pPr lvl="4"/>
             <a:r>
-              <a:rPr lang="en-US" smtClean="0"/>
+              <a:rPr lang="en-US"/>
               <a:t>Fifth level</a:t>
             </a:r>
-            <a:endParaRPr lang="en-US"/>
           </a:p>
         </p:txBody>
       </p:sp>
@@ -2241,7 +2239,7 @@
           <a:p>
             <a:pPr lvl="0"/>
             <a:r>
-              <a:rPr lang="en-US" smtClean="0"/>
+              <a:rPr lang="en-US"/>
               <a:t>Click to edit Master text styles</a:t>
             </a:r>
           </a:p>
@@ -2264,7 +2262,7 @@
           <a:p>
             <a:fld id="{5BCAD085-E8A6-8845-BD4E-CB4CCA059FC4}" type="datetimeFigureOut">
               <a:rPr lang="en-US" smtClean="0"/>
-              <a:t>1/27/13</a:t>
+              <a:t>5/24/2026</a:t>
             </a:fld>
             <a:endParaRPr lang="en-US"/>
           </a:p>
@@ -2367,10 +2365,9 @@
           </a:lstStyle>
           <a:p>
             <a:r>
-              <a:rPr lang="en-US" smtClean="0"/>
+              <a:rPr lang="en-US"/>
               <a:t>Click to edit Master title style</a:t>
             </a:r>
-            <a:endParaRPr lang="en-US"/>
           </a:p>
         </p:txBody>
       </p:sp>
@@ -2494,7 +2491,7 @@
           <a:p>
             <a:pPr lvl="0"/>
             <a:r>
-              <a:rPr lang="en-US" smtClean="0"/>
+              <a:rPr lang="en-US"/>
               <a:t>Click to edit Master text styles</a:t>
             </a:r>
           </a:p>
@@ -2517,7 +2514,7 @@
           <a:p>
             <a:fld id="{5BCAD085-E8A6-8845-BD4E-CB4CCA059FC4}" type="datetimeFigureOut">
               <a:rPr lang="en-US" smtClean="0"/>
-              <a:t>1/27/13</a:t>
+              <a:t>5/24/2026</a:t>
             </a:fld>
             <a:endParaRPr lang="en-US"/>
           </a:p>
@@ -2626,10 +2623,9 @@
           <a:lstStyle/>
           <a:p>
             <a:r>
-              <a:rPr lang="en-US" smtClean="0"/>
+              <a:rPr lang="en-US"/>
               <a:t>Click to edit Master title style</a:t>
             </a:r>
-            <a:endParaRPr lang="en-US"/>
           </a:p>
         </p:txBody>
       </p:sp>
@@ -2660,38 +2656,37 @@
           <a:p>
             <a:pPr lvl="0"/>
             <a:r>
-              <a:rPr lang="en-US" smtClean="0"/>
+              <a:rPr lang="en-US"/>
               <a:t>Click to edit Master text styles</a:t>
             </a:r>
           </a:p>
           <a:p>
             <a:pPr lvl="1"/>
             <a:r>
-              <a:rPr lang="en-US" smtClean="0"/>
+              <a:rPr lang="en-US"/>
               <a:t>Second level</a:t>
             </a:r>
           </a:p>
           <a:p>
             <a:pPr lvl="2"/>
             <a:r>
-              <a:rPr lang="en-US" smtClean="0"/>
+              <a:rPr lang="en-US"/>
               <a:t>Third level</a:t>
             </a:r>
           </a:p>
           <a:p>
             <a:pPr lvl="3"/>
             <a:r>
-              <a:rPr lang="en-US" smtClean="0"/>
+              <a:rPr lang="en-US"/>
               <a:t>Fourth level</a:t>
             </a:r>
           </a:p>
           <a:p>
             <a:pPr lvl="4"/>
             <a:r>
-              <a:rPr lang="en-US" smtClean="0"/>
+              <a:rPr lang="en-US"/>
               <a:t>Fifth level</a:t>
             </a:r>
-            <a:endParaRPr lang="en-US"/>
           </a:p>
         </p:txBody>
       </p:sp>
@@ -2730,7 +2725,7 @@
           <a:p>
             <a:fld id="{5BCAD085-E8A6-8845-BD4E-CB4CCA059FC4}" type="datetimeFigureOut">
               <a:rPr lang="en-US" smtClean="0"/>
-              <a:t>1/27/13</a:t>
+              <a:t>5/24/2026</a:t>
             </a:fld>
             <a:endParaRPr lang="en-US"/>
           </a:p>
@@ -3089,7 +3084,7 @@
 </file>
 
 <file path=ppt/slides/slide1.xml><?xml version="1.0" encoding="utf-8"?>
-<p:sld xmlns:a="http://schemas.openxmlformats.org/drawingml/2006/main" xmlns:p="http://schemas.openxmlformats.org/presentationml/2006/main" xmlns:r="http://schemas.openxmlformats.org/officeDocument/2006/relationships">
+<p:sld xmlns:a="http://schemas.openxmlformats.org/drawingml/2006/main" xmlns:r="http://schemas.openxmlformats.org/officeDocument/2006/relationships" xmlns:p="http://schemas.openxmlformats.org/presentationml/2006/main">
   <p:cSld>
     <p:spTree>
       <p:nvGrpSpPr>
@@ -3097,7 +3092,14 @@
         <p:cNvGrpSpPr/>
         <p:nvPr/>
       </p:nvGrpSpPr>
-      <p:grpSpPr/>
+      <p:grpSpPr>
+        <a:xfrm>
+          <a:off x="0" y="0"/>
+          <a:ext cx="0" cy="0"/>
+          <a:chOff x="0" y="0"/>
+          <a:chExt cx="0" cy="0"/>
+        </a:xfrm>
+      </p:grpSpPr>
       <p:pic>
         <p:nvPicPr>
           <p:cNvPr id="2" name="Picture 1" descr="temp_slide_0.png"/>
@@ -3187,10 +3189,14 @@
               </a:defRPr>
             </a:pPr>
             <a:r>
+              <a:rPr dirty="0"/>
               <a:t>Secure File Encryption System</a:t>
             </a:r>
-            <a:br/>
-            <a:r>
+            <a:br>
+              <a:rPr dirty="0"/>
+            </a:br>
+            <a:r>
+              <a:rPr dirty="0"/>
               <a:t>using Hybrid Cryptography</a:t>
             </a:r>
           </a:p>
@@ -3226,6 +3232,7 @@
               </a:defRPr>
             </a:pPr>
             <a:r>
+              <a:rPr dirty="0"/>
               <a:t>Information Security — Group Project</a:t>
             </a:r>
           </a:p>
@@ -3239,7 +3246,7 @@
         </p:nvSpPr>
         <p:spPr>
           <a:xfrm>
-            <a:off x="3169995" y="4391322"/>
+            <a:off x="3583463" y="4419026"/>
             <a:ext cx="935235" cy="333375"/>
           </a:xfrm>
           <a:prstGeom prst="rect">
@@ -3261,6 +3268,7 @@
               </a:defRPr>
             </a:pPr>
             <a:r>
+              <a:rPr dirty="0"/>
               <a:t>RSA-2048</a:t>
             </a:r>
           </a:p>
@@ -3274,7 +3282,7 @@
         </p:nvSpPr>
         <p:spPr>
           <a:xfrm>
-            <a:off x="4219531" y="4391322"/>
+            <a:off x="4652876" y="4431082"/>
             <a:ext cx="1178867" cy="333375"/>
           </a:xfrm>
           <a:prstGeom prst="rect">
@@ -3296,6 +3304,7 @@
               </a:defRPr>
             </a:pPr>
             <a:r>
+              <a:rPr dirty="0"/>
               <a:t>AES-256-CBC</a:t>
             </a:r>
           </a:p>
@@ -3309,7 +3318,7 @@
         </p:nvSpPr>
         <p:spPr>
           <a:xfrm>
-            <a:off x="5512698" y="4391322"/>
+            <a:off x="5997732" y="4427106"/>
             <a:ext cx="1254323" cy="333375"/>
           </a:xfrm>
           <a:prstGeom prst="rect">
@@ -3344,7 +3353,7 @@
         </p:nvSpPr>
         <p:spPr>
           <a:xfrm>
-            <a:off x="6881321" y="4391322"/>
+            <a:off x="7398161" y="4431080"/>
             <a:ext cx="1656010" cy="333375"/>
           </a:xfrm>
           <a:prstGeom prst="rect">
@@ -3366,6 +3375,7 @@
               </a:defRPr>
             </a:pPr>
             <a:r>
+              <a:rPr dirty="0"/>
               <a:t>PYQT6 DESKTOP APP</a:t>
             </a:r>
           </a:p>
@@ -3415,7 +3425,7 @@
 </file>
 
 <file path=ppt/slides/slide10.xml><?xml version="1.0" encoding="utf-8"?>
-<p:sld xmlns:a="http://schemas.openxmlformats.org/drawingml/2006/main" xmlns:p="http://schemas.openxmlformats.org/presentationml/2006/main" xmlns:r="http://schemas.openxmlformats.org/officeDocument/2006/relationships">
+<p:sld xmlns:a="http://schemas.openxmlformats.org/drawingml/2006/main" xmlns:r="http://schemas.openxmlformats.org/officeDocument/2006/relationships" xmlns:p="http://schemas.openxmlformats.org/presentationml/2006/main">
   <p:cSld>
     <p:spTree>
       <p:nvGrpSpPr>
@@ -3423,7 +3433,14 @@
         <p:cNvGrpSpPr/>
         <p:nvPr/>
       </p:nvGrpSpPr>
-      <p:grpSpPr/>
+      <p:grpSpPr>
+        <a:xfrm>
+          <a:off x="0" y="0"/>
+          <a:ext cx="0" cy="0"/>
+          <a:chOff x="0" y="0"/>
+          <a:chExt cx="0" cy="0"/>
+        </a:xfrm>
+      </p:grpSpPr>
       <p:pic>
         <p:nvPicPr>
           <p:cNvPr id="2" name="Picture 1" descr="temp_slide_9.png"/>
@@ -3456,7 +3473,7 @@
         </p:nvSpPr>
         <p:spPr>
           <a:xfrm>
-            <a:off x="761999" y="1037629"/>
+            <a:off x="1000759" y="1084658"/>
             <a:ext cx="938510" cy="333375"/>
           </a:xfrm>
           <a:prstGeom prst="rect">
@@ -3947,7 +3964,7 @@
         <p:spPr>
           <a:xfrm>
             <a:off x="6524624" y="2780704"/>
-            <a:ext cx="4629149" cy="986432"/>
+            <a:ext cx="4629149" cy="738664"/>
           </a:xfrm>
           <a:prstGeom prst="rect">
             <a:avLst/>
@@ -3968,18 +3985,28 @@
               </a:defRPr>
             </a:pPr>
             <a:r>
+              <a:rPr sz="1200" dirty="0"/>
               <a:t>• Private key stored unencrypted on disk</a:t>
             </a:r>
-            <a:br/>
-            <a:r>
+            <a:br>
+              <a:rPr sz="1200" dirty="0"/>
+            </a:br>
+            <a:r>
+              <a:rPr sz="1200" dirty="0"/>
               <a:t>• No perfect forward secrecy (RSA reuse)</a:t>
             </a:r>
-            <a:br/>
-            <a:r>
+            <a:br>
+              <a:rPr sz="1200" dirty="0"/>
+            </a:br>
+            <a:r>
+              <a:rPr sz="1200" dirty="0"/>
               <a:t>• No key revocation mechanism</a:t>
             </a:r>
-            <a:br/>
-            <a:r>
+            <a:br>
+              <a:rPr sz="1200" dirty="0"/>
+            </a:br>
+            <a:r>
+              <a:rPr sz="1200" dirty="0"/>
               <a:t>• Single-recipient encryption only</a:t>
             </a:r>
           </a:p>
@@ -4029,7 +4056,7 @@
         <p:spPr>
           <a:xfrm>
             <a:off x="6524624" y="4691062"/>
-            <a:ext cx="4629149" cy="986432"/>
+            <a:ext cx="4629149" cy="738664"/>
           </a:xfrm>
           <a:prstGeom prst="rect">
             <a:avLst/>
@@ -4050,18 +4077,28 @@
               </a:defRPr>
             </a:pPr>
             <a:r>
+              <a:rPr sz="1200"/>
               <a:t>• Passphrase-protected private key (AES-256-GCM wrapping)</a:t>
             </a:r>
-            <a:br/>
-            <a:r>
+            <a:br>
+              <a:rPr sz="1200"/>
+            </a:br>
+            <a:r>
+              <a:rPr sz="1200"/>
               <a:t>• Digital signatures (RSA + SHA-256)</a:t>
             </a:r>
-            <a:br/>
-            <a:r>
+            <a:br>
+              <a:rPr sz="1200"/>
+            </a:br>
+            <a:r>
+              <a:rPr sz="1200"/>
               <a:t>• Elliptic Curve Cryptography (ECDH)</a:t>
             </a:r>
-            <a:br/>
-            <a:r>
+            <a:br>
+              <a:rPr sz="1200"/>
+            </a:br>
+            <a:r>
+              <a:rPr sz="1200"/>
               <a:t>• Multi-recipient support</a:t>
             </a:r>
           </a:p>
@@ -4076,7 +4113,7 @@
 </file>
 
 <file path=ppt/slides/slide11.xml><?xml version="1.0" encoding="utf-8"?>
-<p:sld xmlns:a="http://schemas.openxmlformats.org/drawingml/2006/main" xmlns:p="http://schemas.openxmlformats.org/presentationml/2006/main" xmlns:r="http://schemas.openxmlformats.org/officeDocument/2006/relationships">
+<p:sld xmlns:a="http://schemas.openxmlformats.org/drawingml/2006/main" xmlns:r="http://schemas.openxmlformats.org/officeDocument/2006/relationships" xmlns:p="http://schemas.openxmlformats.org/presentationml/2006/main">
   <p:cSld>
     <p:spTree>
       <p:nvGrpSpPr>
@@ -4084,7 +4121,14 @@
         <p:cNvGrpSpPr/>
         <p:nvPr/>
       </p:nvGrpSpPr>
-      <p:grpSpPr/>
+      <p:grpSpPr>
+        <a:xfrm>
+          <a:off x="0" y="0"/>
+          <a:ext cx="0" cy="0"/>
+          <a:chOff x="0" y="0"/>
+          <a:chExt cx="0" cy="0"/>
+        </a:xfrm>
+      </p:grpSpPr>
       <p:pic>
         <p:nvPicPr>
           <p:cNvPr id="2" name="Picture 1" descr="temp_slide_10.png"/>
@@ -4258,7 +4302,7 @@
 </file>
 
 <file path=ppt/slides/slide2.xml><?xml version="1.0" encoding="utf-8"?>
-<p:sld xmlns:a="http://schemas.openxmlformats.org/drawingml/2006/main" xmlns:p="http://schemas.openxmlformats.org/presentationml/2006/main" xmlns:r="http://schemas.openxmlformats.org/officeDocument/2006/relationships">
+<p:sld xmlns:a="http://schemas.openxmlformats.org/drawingml/2006/main" xmlns:r="http://schemas.openxmlformats.org/officeDocument/2006/relationships" xmlns:p="http://schemas.openxmlformats.org/presentationml/2006/main">
   <p:cSld>
     <p:spTree>
       <p:nvGrpSpPr>
@@ -4266,7 +4310,14 @@
         <p:cNvGrpSpPr/>
         <p:nvPr/>
       </p:nvGrpSpPr>
-      <p:grpSpPr/>
+      <p:grpSpPr>
+        <a:xfrm>
+          <a:off x="0" y="0"/>
+          <a:ext cx="0" cy="0"/>
+          <a:chOff x="0" y="0"/>
+          <a:chExt cx="0" cy="0"/>
+        </a:xfrm>
+      </p:grpSpPr>
       <p:pic>
         <p:nvPicPr>
           <p:cNvPr id="2" name="Picture 1" descr="temp_slide_1.png"/>
@@ -4283,7 +4334,7 @@
         </p:blipFill>
         <p:spPr>
           <a:xfrm>
-            <a:off x="0" y="0"/>
+            <a:off x="-726" y="0"/>
             <a:ext cx="12191999" cy="6858000"/>
           </a:xfrm>
           <a:prstGeom prst="rect">
@@ -4299,8 +4350,8 @@
         </p:nvSpPr>
         <p:spPr>
           <a:xfrm>
-            <a:off x="761999" y="1253132"/>
-            <a:ext cx="1289000" cy="333375"/>
+            <a:off x="1038224" y="1301530"/>
+            <a:ext cx="822962" cy="138499"/>
           </a:xfrm>
           <a:prstGeom prst="rect">
             <a:avLst/>
@@ -4321,6 +4372,7 @@
               </a:defRPr>
             </a:pPr>
             <a:r>
+              <a:rPr dirty="0"/>
               <a:t>INTRODUCTION</a:t>
             </a:r>
           </a:p>
@@ -4391,6 +4443,7 @@
               </a:defRPr>
             </a:pPr>
             <a:r>
+              <a:rPr dirty="0"/>
               <a:t>Data in Transit</a:t>
             </a:r>
           </a:p>
@@ -4426,6 +4479,7 @@
               </a:defRPr>
             </a:pPr>
             <a:r>
+              <a:rPr dirty="0"/>
               <a:t>Files sent over networks can be intercepted by attackers using packet sniffing tools</a:t>
             </a:r>
           </a:p>
@@ -4601,6 +4655,7 @@
               </a:defRPr>
             </a:pPr>
             <a:r>
+              <a:rPr dirty="0"/>
               <a:t>Solution: Combine symmetric speed with asymmetric security — Hybrid Cryptography</a:t>
             </a:r>
           </a:p>
@@ -4615,7 +4670,7 @@
 </file>
 
 <file path=ppt/slides/slide3.xml><?xml version="1.0" encoding="utf-8"?>
-<p:sld xmlns:a="http://schemas.openxmlformats.org/drawingml/2006/main" xmlns:p="http://schemas.openxmlformats.org/presentationml/2006/main" xmlns:r="http://schemas.openxmlformats.org/officeDocument/2006/relationships">
+<p:sld xmlns:a="http://schemas.openxmlformats.org/drawingml/2006/main" xmlns:r="http://schemas.openxmlformats.org/officeDocument/2006/relationships" xmlns:p="http://schemas.openxmlformats.org/presentationml/2006/main">
   <p:cSld>
     <p:spTree>
       <p:nvGrpSpPr>
@@ -4623,7 +4678,14 @@
         <p:cNvGrpSpPr/>
         <p:nvPr/>
       </p:nvGrpSpPr>
-      <p:grpSpPr/>
+      <p:grpSpPr>
+        <a:xfrm>
+          <a:off x="0" y="0"/>
+          <a:ext cx="0" cy="0"/>
+          <a:chOff x="0" y="0"/>
+          <a:chExt cx="0" cy="0"/>
+        </a:xfrm>
+      </p:grpSpPr>
       <p:pic>
         <p:nvPicPr>
           <p:cNvPr id="2" name="Picture 1" descr="temp_slide_2.png"/>
@@ -4656,8 +4718,8 @@
         </p:nvSpPr>
         <p:spPr>
           <a:xfrm>
-            <a:off x="761999" y="952500"/>
-            <a:ext cx="813643" cy="333375"/>
+            <a:off x="959707" y="1001924"/>
+            <a:ext cx="442786" cy="138499"/>
           </a:xfrm>
           <a:prstGeom prst="rect">
             <a:avLst/>
@@ -4678,6 +4740,7 @@
               </a:defRPr>
             </a:pPr>
             <a:r>
+              <a:rPr dirty="0"/>
               <a:t>THEORY</a:t>
             </a:r>
           </a:p>
@@ -4761,7 +4824,7 @@
         </p:nvSpPr>
         <p:spPr>
           <a:xfrm>
-            <a:off x="1038224" y="2695575"/>
+            <a:off x="1046284" y="2805123"/>
             <a:ext cx="4629149" cy="471487"/>
           </a:xfrm>
           <a:prstGeom prst="rect">
@@ -4796,7 +4859,7 @@
         </p:nvSpPr>
         <p:spPr>
           <a:xfrm>
-            <a:off x="1038224" y="3071812"/>
+            <a:off x="1046284" y="3181360"/>
             <a:ext cx="4629149" cy="476250"/>
           </a:xfrm>
           <a:prstGeom prst="rect">
@@ -4818,6 +4881,7 @@
               </a:defRPr>
             </a:pPr>
             <a:r>
+              <a:rPr dirty="0"/>
               <a:t>✅ Handles any file size</a:t>
             </a:r>
           </a:p>
@@ -4831,7 +4895,7 @@
         </p:nvSpPr>
         <p:spPr>
           <a:xfrm>
-            <a:off x="1038224" y="3452812"/>
+            <a:off x="1046284" y="3562360"/>
             <a:ext cx="4629149" cy="476250"/>
           </a:xfrm>
           <a:prstGeom prst="rect">
@@ -4866,7 +4930,7 @@
         </p:nvSpPr>
         <p:spPr>
           <a:xfrm>
-            <a:off x="1038224" y="3833812"/>
+            <a:off x="1046284" y="3943360"/>
             <a:ext cx="4629149" cy="476250"/>
           </a:xfrm>
           <a:prstGeom prst="rect">
@@ -4901,7 +4965,7 @@
         </p:nvSpPr>
         <p:spPr>
           <a:xfrm>
-            <a:off x="1038224" y="4214812"/>
+            <a:off x="1046284" y="4324360"/>
             <a:ext cx="4629149" cy="471487"/>
           </a:xfrm>
           <a:prstGeom prst="rect">
@@ -4971,7 +5035,7 @@
         </p:nvSpPr>
         <p:spPr>
           <a:xfrm>
-            <a:off x="6524624" y="2695575"/>
+            <a:off x="6532684" y="2805123"/>
             <a:ext cx="4629149" cy="471487"/>
           </a:xfrm>
           <a:prstGeom prst="rect">
@@ -5006,7 +5070,7 @@
         </p:nvSpPr>
         <p:spPr>
           <a:xfrm>
-            <a:off x="6524624" y="3071812"/>
+            <a:off x="6532684" y="3181360"/>
             <a:ext cx="4629149" cy="476250"/>
           </a:xfrm>
           <a:prstGeom prst="rect">
@@ -5041,7 +5105,7 @@
         </p:nvSpPr>
         <p:spPr>
           <a:xfrm>
-            <a:off x="6524624" y="3452812"/>
+            <a:off x="6532684" y="3562360"/>
             <a:ext cx="4629149" cy="476250"/>
           </a:xfrm>
           <a:prstGeom prst="rect">
@@ -5076,7 +5140,7 @@
         </p:nvSpPr>
         <p:spPr>
           <a:xfrm>
-            <a:off x="6524624" y="3833812"/>
+            <a:off x="6532684" y="3943360"/>
             <a:ext cx="4629149" cy="476250"/>
           </a:xfrm>
           <a:prstGeom prst="rect">
@@ -5111,7 +5175,7 @@
         </p:nvSpPr>
         <p:spPr>
           <a:xfrm>
-            <a:off x="6524624" y="4214812"/>
+            <a:off x="6532684" y="4324360"/>
             <a:ext cx="4629149" cy="471487"/>
           </a:xfrm>
           <a:prstGeom prst="rect">
@@ -5146,8 +5210,8 @@
         </p:nvSpPr>
         <p:spPr>
           <a:xfrm>
-            <a:off x="1505396" y="5295900"/>
-            <a:ext cx="1081236" cy="466725"/>
+            <a:off x="1656925" y="5405401"/>
+            <a:ext cx="767541" cy="150041"/>
           </a:xfrm>
           <a:prstGeom prst="rect">
             <a:avLst/>
@@ -5168,7 +5232,8 @@
               </a:defRPr>
             </a:pPr>
             <a:r>
-              <a:t>📄 File Data</a:t>
+              <a:rPr dirty="0"/>
+              <a:t>File Data</a:t>
             </a:r>
           </a:p>
         </p:txBody>
@@ -5181,8 +5246,8 @@
         </p:nvSpPr>
         <p:spPr>
           <a:xfrm>
-            <a:off x="2929532" y="5300662"/>
-            <a:ext cx="1393179" cy="457200"/>
+            <a:off x="3155006" y="5407768"/>
+            <a:ext cx="968425" cy="150041"/>
           </a:xfrm>
           <a:prstGeom prst="rect">
             <a:avLst/>
@@ -5203,6 +5268,7 @@
               </a:defRPr>
             </a:pPr>
             <a:r>
+              <a:rPr dirty="0"/>
               <a:t>AES-256 Encrypt</a:t>
             </a:r>
           </a:p>
@@ -5216,8 +5282,8 @@
         </p:nvSpPr>
         <p:spPr>
           <a:xfrm>
-            <a:off x="4665612" y="5295900"/>
-            <a:ext cx="1193899" cy="466725"/>
+            <a:off x="4811932" y="5407768"/>
+            <a:ext cx="913860" cy="150041"/>
           </a:xfrm>
           <a:prstGeom prst="rect">
             <a:avLst/>
@@ -5238,7 +5304,8 @@
               </a:defRPr>
             </a:pPr>
             <a:r>
-              <a:t>🔒 Ciphertext</a:t>
+              <a:rPr dirty="0"/>
+              <a:t> Ciphertext</a:t>
             </a:r>
           </a:p>
         </p:txBody>
@@ -5251,8 +5318,8 @@
         </p:nvSpPr>
         <p:spPr>
           <a:xfrm>
-            <a:off x="6227712" y="5295900"/>
-            <a:ext cx="1019770" cy="466725"/>
+            <a:off x="6300864" y="5403034"/>
+            <a:ext cx="815781" cy="150041"/>
           </a:xfrm>
           <a:prstGeom prst="rect">
             <a:avLst/>
@@ -5273,6 +5340,7 @@
               </a:defRPr>
             </a:pPr>
             <a:r>
+              <a:rPr dirty="0"/>
               <a:t>🗝 AES Key</a:t>
             </a:r>
           </a:p>
@@ -5286,8 +5354,8 @@
         </p:nvSpPr>
         <p:spPr>
           <a:xfrm>
-            <a:off x="7590382" y="5300662"/>
-            <a:ext cx="1482030" cy="457200"/>
+            <a:off x="7810930" y="5410135"/>
+            <a:ext cx="1036329" cy="150041"/>
           </a:xfrm>
           <a:prstGeom prst="rect">
             <a:avLst/>
@@ -5308,6 +5376,7 @@
               </a:defRPr>
             </a:pPr>
             <a:r>
+              <a:rPr dirty="0"/>
               <a:t>RSA-2048 Encrypt</a:t>
             </a:r>
           </a:p>
@@ -5321,8 +5390,8 @@
         </p:nvSpPr>
         <p:spPr>
           <a:xfrm>
-            <a:off x="9415312" y="5295900"/>
-            <a:ext cx="1271140" cy="466725"/>
+            <a:off x="9602190" y="5403034"/>
+            <a:ext cx="913860" cy="150041"/>
           </a:xfrm>
           <a:prstGeom prst="rect">
             <a:avLst/>
@@ -5343,7 +5412,8 @@
               </a:defRPr>
             </a:pPr>
             <a:r>
-              <a:t>📦 .enc Bundle</a:t>
+              <a:rPr dirty="0"/>
+              <a:t> .enc Bundle</a:t>
             </a:r>
           </a:p>
         </p:txBody>
@@ -5357,7 +5427,7 @@
 </file>
 
 <file path=ppt/slides/slide4.xml><?xml version="1.0" encoding="utf-8"?>
-<p:sld xmlns:a="http://schemas.openxmlformats.org/drawingml/2006/main" xmlns:p="http://schemas.openxmlformats.org/presentationml/2006/main" xmlns:r="http://schemas.openxmlformats.org/officeDocument/2006/relationships">
+<p:sld xmlns:a="http://schemas.openxmlformats.org/drawingml/2006/main" xmlns:r="http://schemas.openxmlformats.org/officeDocument/2006/relationships" xmlns:p="http://schemas.openxmlformats.org/presentationml/2006/main">
   <p:cSld>
     <p:spTree>
       <p:nvGrpSpPr>
@@ -5365,7 +5435,14 @@
         <p:cNvGrpSpPr/>
         <p:nvPr/>
       </p:nvGrpSpPr>
-      <p:grpSpPr/>
+      <p:grpSpPr>
+        <a:xfrm>
+          <a:off x="0" y="0"/>
+          <a:ext cx="0" cy="0"/>
+          <a:chOff x="0" y="0"/>
+          <a:chExt cx="0" cy="0"/>
+        </a:xfrm>
+      </p:grpSpPr>
       <p:pic>
         <p:nvPicPr>
           <p:cNvPr id="2" name="Picture 1" descr="temp_slide_3.png"/>
@@ -5398,8 +5475,8 @@
         </p:nvSpPr>
         <p:spPr>
           <a:xfrm>
-            <a:off x="761999" y="1006375"/>
-            <a:ext cx="1297483" cy="333375"/>
+            <a:off x="989023" y="1053924"/>
+            <a:ext cx="858696" cy="143026"/>
           </a:xfrm>
           <a:prstGeom prst="rect">
             <a:avLst/>
@@ -5420,6 +5497,7 @@
               </a:defRPr>
             </a:pPr>
             <a:r>
+              <a:rPr dirty="0"/>
               <a:t>METHODOLOGY</a:t>
             </a:r>
           </a:p>
@@ -5468,8 +5546,8 @@
         </p:nvSpPr>
         <p:spPr>
           <a:xfrm>
-            <a:off x="766762" y="2125563"/>
-            <a:ext cx="1622226" cy="490537"/>
+            <a:off x="989023" y="2244625"/>
+            <a:ext cx="1622226" cy="161583"/>
           </a:xfrm>
           <a:prstGeom prst="rect">
             <a:avLst/>
@@ -5490,6 +5568,7 @@
               </a:defRPr>
             </a:pPr>
             <a:r>
+              <a:rPr dirty="0"/>
               <a:t>Algorithm</a:t>
             </a:r>
           </a:p>
@@ -5503,8 +5582,8 @@
         </p:nvSpPr>
         <p:spPr>
           <a:xfrm>
-            <a:off x="2388988" y="2125563"/>
-            <a:ext cx="2039838" cy="490537"/>
+            <a:off x="2611249" y="2244625"/>
+            <a:ext cx="2039838" cy="161583"/>
           </a:xfrm>
           <a:prstGeom prst="rect">
             <a:avLst/>
@@ -5538,8 +5617,8 @@
         </p:nvSpPr>
         <p:spPr>
           <a:xfrm>
-            <a:off x="4428826" y="2125563"/>
-            <a:ext cx="1642020" cy="490537"/>
+            <a:off x="4651087" y="2244625"/>
+            <a:ext cx="1642020" cy="161583"/>
           </a:xfrm>
           <a:prstGeom prst="rect">
             <a:avLst/>
@@ -5573,8 +5652,8 @@
         </p:nvSpPr>
         <p:spPr>
           <a:xfrm>
-            <a:off x="6070847" y="2125563"/>
-            <a:ext cx="2263824" cy="490537"/>
+            <a:off x="6293108" y="2244625"/>
+            <a:ext cx="2263824" cy="161583"/>
           </a:xfrm>
           <a:prstGeom prst="rect">
             <a:avLst/>
@@ -5608,8 +5687,8 @@
         </p:nvSpPr>
         <p:spPr>
           <a:xfrm>
-            <a:off x="8334671" y="2125563"/>
-            <a:ext cx="3090564" cy="490537"/>
+            <a:off x="8556932" y="2244625"/>
+            <a:ext cx="3090564" cy="161583"/>
           </a:xfrm>
           <a:prstGeom prst="rect">
             <a:avLst/>
@@ -5643,8 +5722,8 @@
         </p:nvSpPr>
         <p:spPr>
           <a:xfrm>
-            <a:off x="766762" y="2520850"/>
-            <a:ext cx="1622226" cy="461962"/>
+            <a:off x="1018452" y="2639912"/>
+            <a:ext cx="626910" cy="150041"/>
           </a:xfrm>
           <a:prstGeom prst="rect">
             <a:avLst/>
@@ -5665,6 +5744,7 @@
               </a:defRPr>
             </a:pPr>
             <a:r>
+              <a:rPr dirty="0"/>
               <a:t>AES</a:t>
             </a:r>
           </a:p>
@@ -5678,8 +5758,8 @@
         </p:nvSpPr>
         <p:spPr>
           <a:xfrm>
-            <a:off x="2388988" y="2520850"/>
-            <a:ext cx="2039838" cy="461962"/>
+            <a:off x="2611249" y="2639912"/>
+            <a:ext cx="2039838" cy="150041"/>
           </a:xfrm>
           <a:prstGeom prst="rect">
             <a:avLst/>
@@ -5713,8 +5793,8 @@
         </p:nvSpPr>
         <p:spPr>
           <a:xfrm>
-            <a:off x="4428826" y="2520850"/>
-            <a:ext cx="1642020" cy="461962"/>
+            <a:off x="4651087" y="2639912"/>
+            <a:ext cx="1642020" cy="150041"/>
           </a:xfrm>
           <a:prstGeom prst="rect">
             <a:avLst/>
@@ -5748,8 +5828,8 @@
         </p:nvSpPr>
         <p:spPr>
           <a:xfrm>
-            <a:off x="6070847" y="2520850"/>
-            <a:ext cx="2263824" cy="461962"/>
+            <a:off x="6293108" y="2639912"/>
+            <a:ext cx="2263824" cy="150041"/>
           </a:xfrm>
           <a:prstGeom prst="rect">
             <a:avLst/>
@@ -5783,8 +5863,8 @@
         </p:nvSpPr>
         <p:spPr>
           <a:xfrm>
-            <a:off x="8334671" y="2520850"/>
-            <a:ext cx="3090564" cy="461962"/>
+            <a:off x="8556932" y="2639912"/>
+            <a:ext cx="3090564" cy="150041"/>
           </a:xfrm>
           <a:prstGeom prst="rect">
             <a:avLst/>
@@ -5818,8 +5898,8 @@
         </p:nvSpPr>
         <p:spPr>
           <a:xfrm>
-            <a:off x="766762" y="2887563"/>
-            <a:ext cx="1622226" cy="466725"/>
+            <a:off x="989023" y="3006625"/>
+            <a:ext cx="1622226" cy="150041"/>
           </a:xfrm>
           <a:prstGeom prst="rect">
             <a:avLst/>
@@ -5853,8 +5933,8 @@
         </p:nvSpPr>
         <p:spPr>
           <a:xfrm>
-            <a:off x="2388988" y="2887563"/>
-            <a:ext cx="2039838" cy="466725"/>
+            <a:off x="2611249" y="3006625"/>
+            <a:ext cx="2039838" cy="150041"/>
           </a:xfrm>
           <a:prstGeom prst="rect">
             <a:avLst/>
@@ -5888,8 +5968,8 @@
         </p:nvSpPr>
         <p:spPr>
           <a:xfrm>
-            <a:off x="4428826" y="2887563"/>
-            <a:ext cx="1642020" cy="466725"/>
+            <a:off x="4651087" y="3006625"/>
+            <a:ext cx="1642020" cy="150041"/>
           </a:xfrm>
           <a:prstGeom prst="rect">
             <a:avLst/>
@@ -5923,8 +6003,8 @@
         </p:nvSpPr>
         <p:spPr>
           <a:xfrm>
-            <a:off x="6070847" y="2887563"/>
-            <a:ext cx="2263824" cy="466725"/>
+            <a:off x="6293108" y="3006625"/>
+            <a:ext cx="2263824" cy="150041"/>
           </a:xfrm>
           <a:prstGeom prst="rect">
             <a:avLst/>
@@ -5958,8 +6038,8 @@
         </p:nvSpPr>
         <p:spPr>
           <a:xfrm>
-            <a:off x="8334671" y="2887563"/>
-            <a:ext cx="3090564" cy="466725"/>
+            <a:off x="8556932" y="3006625"/>
+            <a:ext cx="3090564" cy="150041"/>
           </a:xfrm>
           <a:prstGeom prst="rect">
             <a:avLst/>
@@ -5993,8 +6073,8 @@
         </p:nvSpPr>
         <p:spPr>
           <a:xfrm>
-            <a:off x="766762" y="3259038"/>
-            <a:ext cx="1622226" cy="466725"/>
+            <a:off x="989023" y="3378100"/>
+            <a:ext cx="1622226" cy="150041"/>
           </a:xfrm>
           <a:prstGeom prst="rect">
             <a:avLst/>
@@ -6028,8 +6108,8 @@
         </p:nvSpPr>
         <p:spPr>
           <a:xfrm>
-            <a:off x="2388988" y="3259038"/>
-            <a:ext cx="2039838" cy="466725"/>
+            <a:off x="2611249" y="3378100"/>
+            <a:ext cx="2039838" cy="150041"/>
           </a:xfrm>
           <a:prstGeom prst="rect">
             <a:avLst/>
@@ -6063,8 +6143,8 @@
         </p:nvSpPr>
         <p:spPr>
           <a:xfrm>
-            <a:off x="4428826" y="3259038"/>
-            <a:ext cx="1642020" cy="466725"/>
+            <a:off x="4651087" y="3378100"/>
+            <a:ext cx="1642020" cy="150041"/>
           </a:xfrm>
           <a:prstGeom prst="rect">
             <a:avLst/>
@@ -6098,8 +6178,8 @@
         </p:nvSpPr>
         <p:spPr>
           <a:xfrm>
-            <a:off x="6070847" y="3259038"/>
-            <a:ext cx="2263824" cy="466725"/>
+            <a:off x="6293108" y="3378100"/>
+            <a:ext cx="2263824" cy="150041"/>
           </a:xfrm>
           <a:prstGeom prst="rect">
             <a:avLst/>
@@ -6133,8 +6213,8 @@
         </p:nvSpPr>
         <p:spPr>
           <a:xfrm>
-            <a:off x="8334671" y="3259038"/>
-            <a:ext cx="3090564" cy="466725"/>
+            <a:off x="8556932" y="3378100"/>
+            <a:ext cx="3090564" cy="150041"/>
           </a:xfrm>
           <a:prstGeom prst="rect">
             <a:avLst/>
@@ -6168,8 +6248,8 @@
         </p:nvSpPr>
         <p:spPr>
           <a:xfrm>
-            <a:off x="766762" y="3630513"/>
-            <a:ext cx="1622226" cy="466725"/>
+            <a:off x="989023" y="3749575"/>
+            <a:ext cx="1622226" cy="150041"/>
           </a:xfrm>
           <a:prstGeom prst="rect">
             <a:avLst/>
@@ -6203,8 +6283,8 @@
         </p:nvSpPr>
         <p:spPr>
           <a:xfrm>
-            <a:off x="2388988" y="3630513"/>
-            <a:ext cx="2039838" cy="466725"/>
+            <a:off x="2611249" y="3749575"/>
+            <a:ext cx="2039838" cy="150041"/>
           </a:xfrm>
           <a:prstGeom prst="rect">
             <a:avLst/>
@@ -6238,8 +6318,8 @@
         </p:nvSpPr>
         <p:spPr>
           <a:xfrm>
-            <a:off x="4428826" y="3630513"/>
-            <a:ext cx="1642020" cy="466725"/>
+            <a:off x="4651087" y="3749575"/>
+            <a:ext cx="1642020" cy="150041"/>
           </a:xfrm>
           <a:prstGeom prst="rect">
             <a:avLst/>
@@ -6273,8 +6353,8 @@
         </p:nvSpPr>
         <p:spPr>
           <a:xfrm>
-            <a:off x="6070847" y="3630513"/>
-            <a:ext cx="2263824" cy="466725"/>
+            <a:off x="6293108" y="3749575"/>
+            <a:ext cx="2263824" cy="150041"/>
           </a:xfrm>
           <a:prstGeom prst="rect">
             <a:avLst/>
@@ -6308,8 +6388,8 @@
         </p:nvSpPr>
         <p:spPr>
           <a:xfrm>
-            <a:off x="8334671" y="3630513"/>
-            <a:ext cx="3090564" cy="466725"/>
+            <a:off x="8556932" y="3749575"/>
+            <a:ext cx="3090564" cy="150041"/>
           </a:xfrm>
           <a:prstGeom prst="rect">
             <a:avLst/>
@@ -6484,7 +6564,7 @@
 </file>
 
 <file path=ppt/slides/slide5.xml><?xml version="1.0" encoding="utf-8"?>
-<p:sld xmlns:a="http://schemas.openxmlformats.org/drawingml/2006/main" xmlns:p="http://schemas.openxmlformats.org/presentationml/2006/main" xmlns:r="http://schemas.openxmlformats.org/officeDocument/2006/relationships">
+<p:sld xmlns:a="http://schemas.openxmlformats.org/drawingml/2006/main" xmlns:r="http://schemas.openxmlformats.org/officeDocument/2006/relationships" xmlns:p="http://schemas.openxmlformats.org/presentationml/2006/main">
   <p:cSld>
     <p:spTree>
       <p:nvGrpSpPr>
@@ -6492,7 +6572,14 @@
         <p:cNvGrpSpPr/>
         <p:nvPr/>
       </p:nvGrpSpPr>
-      <p:grpSpPr/>
+      <p:grpSpPr>
+        <a:xfrm>
+          <a:off x="0" y="0"/>
+          <a:ext cx="0" cy="0"/>
+          <a:chOff x="0" y="0"/>
+          <a:chExt cx="0" cy="0"/>
+        </a:xfrm>
+      </p:grpSpPr>
       <p:pic>
         <p:nvPicPr>
           <p:cNvPr id="2" name="Picture 1" descr="temp_slide_4.png"/>
@@ -6525,7 +6612,7 @@
         </p:nvSpPr>
         <p:spPr>
           <a:xfrm>
-            <a:off x="761999" y="603795"/>
+            <a:off x="1007532" y="644346"/>
             <a:ext cx="1445567" cy="333375"/>
           </a:xfrm>
           <a:prstGeom prst="rect">
@@ -6547,6 +6634,7 @@
               </a:defRPr>
             </a:pPr>
             <a:r>
+              <a:rPr dirty="0"/>
               <a:t>IMPLEMENTATION</a:t>
             </a:r>
           </a:p>
@@ -6665,8 +6753,8 @@
         </p:nvSpPr>
         <p:spPr>
           <a:xfrm>
-            <a:off x="6248399" y="2146845"/>
-            <a:ext cx="5181599" cy="3298626"/>
+            <a:off x="7844364" y="2318295"/>
+            <a:ext cx="1989667" cy="2923877"/>
           </a:xfrm>
           <a:prstGeom prst="rect">
             <a:avLst/>
@@ -6687,58 +6775,98 @@
               </a:defRPr>
             </a:pPr>
             <a:r>
+              <a:rPr sz="1000" dirty="0"/>
               <a:t>┌─────────────────────────────┐</a:t>
             </a:r>
-            <a:br/>
-            <a:r>
+            <a:br>
+              <a:rPr sz="1000" dirty="0"/>
+            </a:br>
+            <a:r>
+              <a:rPr sz="1000" dirty="0"/>
               <a:t>│  MAGIC HEADER   (8 bytes)  │</a:t>
             </a:r>
-            <a:br/>
-            <a:r>
+            <a:br>
+              <a:rPr sz="1000" dirty="0"/>
+            </a:br>
+            <a:r>
+              <a:rPr sz="1000" dirty="0"/>
               <a:t>├─────────────────────────────┤</a:t>
             </a:r>
-            <a:br/>
-            <a:r>
+            <a:br>
+              <a:rPr sz="1000" dirty="0"/>
+            </a:br>
+            <a:r>
+              <a:rPr sz="1000" dirty="0"/>
               <a:t>│  KEY LENGTH     (2 bytes)  │</a:t>
             </a:r>
-            <a:br/>
-            <a:r>
+            <a:br>
+              <a:rPr sz="1000" dirty="0"/>
+            </a:br>
+            <a:r>
+              <a:rPr sz="1000" dirty="0"/>
               <a:t>├─────────────────────────────┤</a:t>
             </a:r>
-            <a:br/>
-            <a:r>
+            <a:br>
+              <a:rPr sz="1000" dirty="0"/>
+            </a:br>
+            <a:r>
+              <a:rPr sz="1000" dirty="0"/>
               <a:t>│  RSA-ENCRYPTED AES KEY     │</a:t>
             </a:r>
-            <a:br/>
-            <a:r>
+            <a:br>
+              <a:rPr sz="1000" dirty="0"/>
+            </a:br>
+            <a:r>
+              <a:rPr sz="1000" dirty="0"/>
               <a:t>│  (256 bytes for 2048-bit)  │</a:t>
             </a:r>
-            <a:br/>
-            <a:r>
+            <a:br>
+              <a:rPr sz="1000" dirty="0"/>
+            </a:br>
+            <a:r>
+              <a:rPr sz="1000" dirty="0"/>
               <a:t>├─────────────────────────────┤</a:t>
             </a:r>
-            <a:br/>
-            <a:r>
+            <a:br>
+              <a:rPr sz="1000" dirty="0"/>
+            </a:br>
+            <a:r>
+              <a:rPr sz="1000" dirty="0"/>
               <a:t>│  AES IV         (16 bytes) │</a:t>
             </a:r>
-            <a:br/>
-            <a:r>
+            <a:br>
+              <a:rPr sz="1000" dirty="0"/>
+            </a:br>
+            <a:r>
+              <a:rPr sz="1000" dirty="0"/>
               <a:t>├─────────────────────────────┤</a:t>
             </a:r>
-            <a:br/>
-            <a:r>
+            <a:br>
+              <a:rPr sz="1000" dirty="0"/>
+            </a:br>
+            <a:r>
+              <a:rPr sz="1000" dirty="0"/>
               <a:t>│  HMAC-SHA256    (32 bytes) │</a:t>
             </a:r>
-            <a:br/>
-            <a:r>
+            <a:br>
+              <a:rPr sz="1000" dirty="0"/>
+            </a:br>
+            <a:r>
+              <a:rPr sz="1000" dirty="0"/>
               <a:t>├─────────────────────────────┤</a:t>
             </a:r>
-            <a:br/>
-            <a:r>
+            <a:br>
+              <a:rPr sz="1000" dirty="0"/>
+            </a:br>
+            <a:r>
+              <a:rPr sz="1000" dirty="0"/>
               <a:t>│  CIPHERTEXT     (variable) │</a:t>
             </a:r>
-            <a:br/>
-            <a:r>
+            <a:br>
+              <a:rPr sz="1000" dirty="0"/>
+            </a:br>
+            <a:r>
+              <a:rPr sz="1000" dirty="0"/>
               <a:t>└─────────────────────────────┘</a:t>
             </a:r>
           </a:p>
@@ -6788,7 +6916,7 @@
 </file>
 
 <file path=ppt/slides/slide6.xml><?xml version="1.0" encoding="utf-8"?>
-<p:sld xmlns:a="http://schemas.openxmlformats.org/drawingml/2006/main" xmlns:p="http://schemas.openxmlformats.org/presentationml/2006/main" xmlns:r="http://schemas.openxmlformats.org/officeDocument/2006/relationships">
+<p:sld xmlns:a="http://schemas.openxmlformats.org/drawingml/2006/main" xmlns:r="http://schemas.openxmlformats.org/officeDocument/2006/relationships" xmlns:p="http://schemas.openxmlformats.org/presentationml/2006/main">
   <p:cSld>
     <p:spTree>
       <p:nvGrpSpPr>
@@ -6796,7 +6924,14 @@
         <p:cNvGrpSpPr/>
         <p:nvPr/>
       </p:nvGrpSpPr>
-      <p:grpSpPr/>
+      <p:grpSpPr>
+        <a:xfrm>
+          <a:off x="0" y="0"/>
+          <a:ext cx="0" cy="0"/>
+          <a:chOff x="0" y="0"/>
+          <a:chExt cx="0" cy="0"/>
+        </a:xfrm>
+      </p:grpSpPr>
       <p:pic>
         <p:nvPicPr>
           <p:cNvPr id="2" name="Picture 1" descr="temp_slide_5.png"/>
@@ -6829,8 +6964,8 @@
         </p:nvSpPr>
         <p:spPr>
           <a:xfrm>
-            <a:off x="761999" y="640853"/>
-            <a:ext cx="647699" cy="333375"/>
+            <a:off x="954617" y="680223"/>
+            <a:ext cx="323850" cy="138499"/>
           </a:xfrm>
           <a:prstGeom prst="rect">
             <a:avLst/>
@@ -6851,6 +6986,7 @@
               </a:defRPr>
             </a:pPr>
             <a:r>
+              <a:rPr dirty="0"/>
               <a:t>CODE</a:t>
             </a:r>
           </a:p>
@@ -6899,8 +7035,8 @@
         </p:nvSpPr>
         <p:spPr>
           <a:xfrm>
-            <a:off x="761999" y="1755278"/>
-            <a:ext cx="5181599" cy="4557117"/>
+            <a:off x="1278466" y="2179140"/>
+            <a:ext cx="5181599" cy="3554819"/>
           </a:xfrm>
           <a:prstGeom prst="rect">
             <a:avLst/>
@@ -6921,75 +7057,280 @@
               </a:defRPr>
             </a:pPr>
             <a:r>
+              <a:rPr sz="1100" dirty="0"/>
               <a:t># AES-256-CBC Encryption</a:t>
             </a:r>
-            <a:br/>
-            <a:r>
-              <a:t>from Crypto.Cipher import AES, PKCS1_OAEP</a:t>
-            </a:r>
-            <a:br/>
-            <a:r>
-              <a:t>from Crypto.PublicKey import RSA</a:t>
-            </a:r>
-            <a:br/>
-            <a:r>
-              <a:t>from Crypto.Random import get_random_bytes</a:t>
-            </a:r>
-            <a:br/>
-            <a:br/>
-            <a:r>
+            <a:br>
+              <a:rPr sz="1100" dirty="0"/>
+            </a:br>
+            <a:r>
+              <a:rPr sz="1100" dirty="0"/>
+              <a:t>from </a:t>
+            </a:r>
+            <a:r>
+              <a:rPr sz="1100" dirty="0" err="1"/>
+              <a:t>Crypto.Cipher</a:t>
+            </a:r>
+            <a:r>
+              <a:rPr sz="1100" dirty="0"/>
+              <a:t> import AES, PKCS1_OAEP</a:t>
+            </a:r>
+            <a:br>
+              <a:rPr sz="1100" dirty="0"/>
+            </a:br>
+            <a:r>
+              <a:rPr sz="1100" dirty="0"/>
+              <a:t>from </a:t>
+            </a:r>
+            <a:r>
+              <a:rPr sz="1100" dirty="0" err="1"/>
+              <a:t>Crypto.PublicKey</a:t>
+            </a:r>
+            <a:r>
+              <a:rPr sz="1100" dirty="0"/>
+              <a:t> import RSA</a:t>
+            </a:r>
+            <a:br>
+              <a:rPr sz="1100" dirty="0"/>
+            </a:br>
+            <a:r>
+              <a:rPr sz="1100" dirty="0"/>
+              <a:t>from </a:t>
+            </a:r>
+            <a:r>
+              <a:rPr sz="1100" dirty="0" err="1"/>
+              <a:t>Crypto.Random</a:t>
+            </a:r>
+            <a:r>
+              <a:rPr sz="1100" dirty="0"/>
+              <a:t> import </a:t>
+            </a:r>
+            <a:r>
+              <a:rPr sz="1100" dirty="0" err="1"/>
+              <a:t>get_random_bytes</a:t>
+            </a:r>
+            <a:br>
+              <a:rPr sz="1100" dirty="0"/>
+            </a:br>
+            <a:br>
+              <a:rPr sz="1100" dirty="0"/>
+            </a:br>
+            <a:r>
+              <a:rPr sz="1100" dirty="0"/>
               <a:t># 1. Generate session key</a:t>
             </a:r>
-            <a:br/>
-            <a:r>
-              <a:t>aes_key = get_random_bytes(32)  # 256-bit</a:t>
-            </a:r>
-            <a:br/>
-            <a:r>
-              <a:t>iv      = get_random_bytes(16)  # 128-bit IV</a:t>
-            </a:r>
-            <a:br/>
-            <a:br/>
-            <a:r>
+            <a:br>
+              <a:rPr sz="1100" dirty="0"/>
+            </a:br>
+            <a:r>
+              <a:rPr sz="1100" dirty="0" err="1"/>
+              <a:t>aes_key</a:t>
+            </a:r>
+            <a:r>
+              <a:rPr sz="1100" dirty="0"/>
+              <a:t> = </a:t>
+            </a:r>
+            <a:r>
+              <a:rPr sz="1100" dirty="0" err="1"/>
+              <a:t>get_random_bytes</a:t>
+            </a:r>
+            <a:r>
+              <a:rPr sz="1100" dirty="0"/>
+              <a:t>(32)  # 256-bit</a:t>
+            </a:r>
+            <a:br>
+              <a:rPr sz="1100" dirty="0"/>
+            </a:br>
+            <a:r>
+              <a:rPr sz="1100" dirty="0"/>
+              <a:t>iv      = </a:t>
+            </a:r>
+            <a:r>
+              <a:rPr sz="1100" dirty="0" err="1"/>
+              <a:t>get_random_bytes</a:t>
+            </a:r>
+            <a:r>
+              <a:rPr sz="1100" dirty="0"/>
+              <a:t>(16)  # 128-bit IV</a:t>
+            </a:r>
+            <a:br>
+              <a:rPr sz="1100" dirty="0"/>
+            </a:br>
+            <a:br>
+              <a:rPr sz="1100" dirty="0"/>
+            </a:br>
+            <a:r>
+              <a:rPr sz="1100" dirty="0"/>
               <a:t># 2. Encrypt file data</a:t>
             </a:r>
-            <a:br/>
-            <a:r>
-              <a:t>cipher = AES.new(aes_key, AES.MODE_CBC, iv)</a:t>
-            </a:r>
-            <a:br/>
-            <a:r>
-              <a:t>ciphertext = cipher.encrypt(pad(data, 16))</a:t>
-            </a:r>
-            <a:br/>
-            <a:br/>
-            <a:r>
+            <a:br>
+              <a:rPr sz="1100" dirty="0"/>
+            </a:br>
+            <a:r>
+              <a:rPr sz="1100" dirty="0"/>
+              <a:t>cipher = </a:t>
+            </a:r>
+            <a:r>
+              <a:rPr sz="1100" dirty="0" err="1"/>
+              <a:t>AES.new</a:t>
+            </a:r>
+            <a:r>
+              <a:rPr sz="1100" dirty="0"/>
+              <a:t>(</a:t>
+            </a:r>
+            <a:r>
+              <a:rPr sz="1100" dirty="0" err="1"/>
+              <a:t>aes_key</a:t>
+            </a:r>
+            <a:r>
+              <a:rPr sz="1100" dirty="0"/>
+              <a:t>, AES.MODE_CBC, iv)</a:t>
+            </a:r>
+            <a:br>
+              <a:rPr sz="1100" dirty="0"/>
+            </a:br>
+            <a:r>
+              <a:rPr sz="1100" dirty="0"/>
+              <a:t>ciphertext = </a:t>
+            </a:r>
+            <a:r>
+              <a:rPr sz="1100" dirty="0" err="1"/>
+              <a:t>cipher.encrypt</a:t>
+            </a:r>
+            <a:r>
+              <a:rPr sz="1100" dirty="0"/>
+              <a:t>(pad(data, 16))</a:t>
+            </a:r>
+            <a:br>
+              <a:rPr sz="1100" dirty="0"/>
+            </a:br>
+            <a:br>
+              <a:rPr sz="1100" dirty="0"/>
+            </a:br>
+            <a:r>
+              <a:rPr sz="1100" dirty="0"/>
               <a:t># 3. HMAC integrity tag</a:t>
             </a:r>
-            <a:br/>
-            <a:r>
-              <a:t>mac = hmac.new(aes_key, iv+ciphertext,</a:t>
-            </a:r>
-            <a:br/>
-            <a:r>
+            <a:br>
+              <a:rPr sz="1100" dirty="0"/>
+            </a:br>
+            <a:r>
+              <a:rPr sz="1100" dirty="0"/>
+              <a:t>mac = </a:t>
+            </a:r>
+            <a:r>
+              <a:rPr sz="1100" dirty="0" err="1"/>
+              <a:t>hmac.new</a:t>
+            </a:r>
+            <a:r>
+              <a:rPr sz="1100" dirty="0"/>
+              <a:t>(</a:t>
+            </a:r>
+            <a:r>
+              <a:rPr sz="1100" dirty="0" err="1"/>
+              <a:t>aes_key</a:t>
+            </a:r>
+            <a:r>
+              <a:rPr sz="1100" dirty="0"/>
+              <a:t>, </a:t>
+            </a:r>
+            <a:r>
+              <a:rPr sz="1100" dirty="0" err="1"/>
+              <a:t>iv+ciphertext</a:t>
+            </a:r>
+            <a:r>
+              <a:rPr sz="1100" dirty="0"/>
+              <a:t>,</a:t>
+            </a:r>
+            <a:br>
+              <a:rPr sz="1100" dirty="0"/>
+            </a:br>
+            <a:r>
+              <a:rPr sz="1100" dirty="0"/>
               <a:t>              hashlib.sha256).digest()</a:t>
             </a:r>
-            <a:br/>
-            <a:br/>
-            <a:r>
+            <a:br>
+              <a:rPr sz="1100" dirty="0"/>
+            </a:br>
+            <a:br>
+              <a:rPr sz="1100" dirty="0"/>
+            </a:br>
+            <a:r>
+              <a:rPr sz="1100" dirty="0"/>
               <a:t># 4. Encrypt AES key with RSA</a:t>
             </a:r>
-            <a:br/>
-            <a:r>
-              <a:t>rsa_key = RSA.import_key(pub_pem)</a:t>
-            </a:r>
-            <a:br/>
-            <a:r>
-              <a:t>cipher_rsa = PKCS1_OAEP.new(rsa_key)</a:t>
-            </a:r>
-            <a:br/>
-            <a:r>
-              <a:t>enc_key = cipher_rsa.encrypt(aes_key)</a:t>
+            <a:br>
+              <a:rPr sz="1100" dirty="0"/>
+            </a:br>
+            <a:r>
+              <a:rPr sz="1100" dirty="0" err="1"/>
+              <a:t>rsa_key</a:t>
+            </a:r>
+            <a:r>
+              <a:rPr sz="1100" dirty="0"/>
+              <a:t> = </a:t>
+            </a:r>
+            <a:r>
+              <a:rPr sz="1100" dirty="0" err="1"/>
+              <a:t>RSA.import_key</a:t>
+            </a:r>
+            <a:r>
+              <a:rPr sz="1100" dirty="0"/>
+              <a:t>(</a:t>
+            </a:r>
+            <a:r>
+              <a:rPr sz="1100" dirty="0" err="1"/>
+              <a:t>pub_pem</a:t>
+            </a:r>
+            <a:r>
+              <a:rPr sz="1100" dirty="0"/>
+              <a:t>)</a:t>
+            </a:r>
+            <a:br>
+              <a:rPr sz="1100" dirty="0"/>
+            </a:br>
+            <a:r>
+              <a:rPr sz="1100" dirty="0" err="1"/>
+              <a:t>cipher_rsa</a:t>
+            </a:r>
+            <a:r>
+              <a:rPr sz="1100" dirty="0"/>
+              <a:t> = PKCS1_OAEP.new(</a:t>
+            </a:r>
+            <a:r>
+              <a:rPr sz="1100" dirty="0" err="1"/>
+              <a:t>rsa_key</a:t>
+            </a:r>
+            <a:r>
+              <a:rPr sz="1100" dirty="0"/>
+              <a:t>)</a:t>
+            </a:r>
+            <a:br>
+              <a:rPr sz="1100" dirty="0"/>
+            </a:br>
+            <a:r>
+              <a:rPr sz="1100" dirty="0" err="1"/>
+              <a:t>enc_key</a:t>
+            </a:r>
+            <a:r>
+              <a:rPr sz="1100" dirty="0"/>
+              <a:t> = </a:t>
+            </a:r>
+            <a:r>
+              <a:rPr sz="1100" dirty="0" err="1"/>
+              <a:t>cipher_rsa.encrypt</a:t>
+            </a:r>
+            <a:r>
+              <a:rPr sz="1100" dirty="0"/>
+              <a:t>(</a:t>
+            </a:r>
+            <a:r>
+              <a:rPr sz="1100" dirty="0" err="1"/>
+              <a:t>aes_key</a:t>
+            </a:r>
+            <a:r>
+              <a:rPr sz="1100" dirty="0"/>
+              <a:t>)</a:t>
             </a:r>
           </a:p>
         </p:txBody>
@@ -7038,7 +7379,7 @@
         <p:spPr>
           <a:xfrm>
             <a:off x="6524624" y="2345828"/>
-            <a:ext cx="4629149" cy="1238250"/>
+            <a:ext cx="4629149" cy="769441"/>
           </a:xfrm>
           <a:prstGeom prst="rect">
             <a:avLst/>
@@ -7059,23 +7400,40 @@
               </a:defRPr>
             </a:pPr>
             <a:r>
+              <a:rPr sz="1000" dirty="0"/>
               <a:t>app.py ← PyQt6 desktop app</a:t>
             </a:r>
-            <a:br/>
-            <a:r>
+            <a:br>
+              <a:rPr sz="1000" dirty="0"/>
+            </a:br>
+            <a:r>
+              <a:rPr sz="1000" dirty="0"/>
               <a:t>hybrid_crypto.py ← Core engine</a:t>
             </a:r>
-            <a:br/>
-            <a:r>
+            <a:br>
+              <a:rPr sz="1000" dirty="0"/>
+            </a:br>
+            <a:r>
+              <a:rPr sz="1000" dirty="0"/>
               <a:t>cli.py ← Terminal CLI</a:t>
             </a:r>
-            <a:br/>
-            <a:r>
+            <a:br>
+              <a:rPr sz="1000" dirty="0"/>
+            </a:br>
+            <a:r>
+              <a:rPr sz="1000" dirty="0"/>
               <a:t>test_crypto.py ← 10 tests (all pass)</a:t>
             </a:r>
-            <a:br/>
-            <a:r>
-              <a:t>dist/HybridCrypto.exe ← Standalone .exe</a:t>
+            <a:br>
+              <a:rPr sz="1000" dirty="0"/>
+            </a:br>
+            <a:r>
+              <a:rPr sz="1000" dirty="0" err="1"/>
+              <a:t>dist</a:t>
+            </a:r>
+            <a:r>
+              <a:rPr sz="1000" dirty="0"/>
+              <a:t>/HybridCrypto.exe ← Standalone .exe</a:t>
             </a:r>
           </a:p>
         </p:txBody>
@@ -7124,7 +7482,7 @@
         <p:spPr>
           <a:xfrm>
             <a:off x="6524624" y="4469903"/>
-            <a:ext cx="4629149" cy="1085850"/>
+            <a:ext cx="4629149" cy="615553"/>
           </a:xfrm>
           <a:prstGeom prst="rect">
             <a:avLst/>
@@ -7145,18 +7503,44 @@
               </a:defRPr>
             </a:pPr>
             <a:r>
-              <a:t>• PyCryptodome 3.19+ (crypto primitives)</a:t>
-            </a:r>
-            <a:br/>
-            <a:r>
+              <a:rPr sz="1000" dirty="0"/>
+              <a:t>• </a:t>
+            </a:r>
+            <a:r>
+              <a:rPr sz="1000" dirty="0" err="1"/>
+              <a:t>PyCryptodome</a:t>
+            </a:r>
+            <a:r>
+              <a:rPr sz="1000" dirty="0"/>
+              <a:t> 3.19+ (crypto primitives)</a:t>
+            </a:r>
+            <a:br>
+              <a:rPr sz="1000" dirty="0"/>
+            </a:br>
+            <a:r>
+              <a:rPr sz="1000" dirty="0"/>
               <a:t>• PyQt6 6.6+ (desktop UI framework)</a:t>
             </a:r>
-            <a:br/>
-            <a:r>
-              <a:t>• PyInstaller (standalone .exe build)</a:t>
-            </a:r>
-            <a:br/>
-            <a:r>
+            <a:br>
+              <a:rPr sz="1000" dirty="0"/>
+            </a:br>
+            <a:r>
+              <a:rPr sz="1000" dirty="0"/>
+              <a:t>• </a:t>
+            </a:r>
+            <a:r>
+              <a:rPr sz="1000" dirty="0" err="1"/>
+              <a:t>PyInstaller</a:t>
+            </a:r>
+            <a:r>
+              <a:rPr sz="1000" dirty="0"/>
+              <a:t> (standalone .exe build)</a:t>
+            </a:r>
+            <a:br>
+              <a:rPr sz="1000" dirty="0"/>
+            </a:br>
+            <a:r>
+              <a:rPr sz="1000" dirty="0"/>
               <a:t>• Python 3.8+ standard library</a:t>
             </a:r>
           </a:p>
@@ -7171,7 +7555,7 @@
 </file>
 
 <file path=ppt/slides/slide7.xml><?xml version="1.0" encoding="utf-8"?>
-<p:sld xmlns:a="http://schemas.openxmlformats.org/drawingml/2006/main" xmlns:p="http://schemas.openxmlformats.org/presentationml/2006/main" xmlns:r="http://schemas.openxmlformats.org/officeDocument/2006/relationships">
+<p:sld xmlns:a="http://schemas.openxmlformats.org/drawingml/2006/main" xmlns:r="http://schemas.openxmlformats.org/officeDocument/2006/relationships" xmlns:p="http://schemas.openxmlformats.org/presentationml/2006/main">
   <p:cSld>
     <p:spTree>
       <p:nvGrpSpPr>
@@ -7179,7 +7563,14 @@
         <p:cNvGrpSpPr/>
         <p:nvPr/>
       </p:nvGrpSpPr>
-      <p:grpSpPr/>
+      <p:grpSpPr>
+        <a:xfrm>
+          <a:off x="0" y="0"/>
+          <a:ext cx="0" cy="0"/>
+          <a:chOff x="0" y="0"/>
+          <a:chExt cx="0" cy="0"/>
+        </a:xfrm>
+      </p:grpSpPr>
       <p:pic>
         <p:nvPicPr>
           <p:cNvPr id="2" name="Picture 1" descr="temp_slide_6.png"/>
@@ -7212,7 +7603,7 @@
         </p:nvSpPr>
         <p:spPr>
           <a:xfrm>
-            <a:off x="761999" y="893117"/>
+            <a:off x="923924" y="938845"/>
             <a:ext cx="668982" cy="333375"/>
           </a:xfrm>
           <a:prstGeom prst="rect">
@@ -7234,6 +7625,7 @@
               </a:defRPr>
             </a:pPr>
             <a:r>
+              <a:rPr dirty="0"/>
               <a:t>DEMO</a:t>
             </a:r>
           </a:p>
@@ -7317,8 +7709,8 @@
         </p:nvSpPr>
         <p:spPr>
           <a:xfrm>
-            <a:off x="923924" y="3255317"/>
-            <a:ext cx="3105149" cy="984795"/>
+            <a:off x="1169457" y="3392684"/>
+            <a:ext cx="3105149" cy="461665"/>
           </a:xfrm>
           <a:prstGeom prst="rect">
             <a:avLst/>
@@ -7339,14 +7731,21 @@
               </a:defRPr>
             </a:pPr>
             <a:r>
+              <a:rPr sz="1000"/>
               <a:t>python cli.py keygen \</a:t>
             </a:r>
-            <a:br/>
-            <a:r>
+            <a:br>
+              <a:rPr sz="1000"/>
+            </a:br>
+            <a:r>
+              <a:rPr sz="1000"/>
               <a:t>  --private keys/private.pem \</a:t>
             </a:r>
-            <a:br/>
-            <a:r>
+            <a:br>
+              <a:rPr sz="1000"/>
+            </a:br>
+            <a:r>
+              <a:rPr sz="1000"/>
               <a:t>  --public  keys/public.pem</a:t>
             </a:r>
           </a:p>
@@ -7361,7 +7760,7 @@
         <p:spPr>
           <a:xfrm>
             <a:off x="923924" y="4240113"/>
-            <a:ext cx="3105149" cy="289470"/>
+            <a:ext cx="3105149" cy="153888"/>
           </a:xfrm>
           <a:prstGeom prst="rect">
             <a:avLst/>
@@ -7382,6 +7781,7 @@
               </a:defRPr>
             </a:pPr>
             <a:r>
+              <a:rPr sz="1000" dirty="0"/>
               <a:t>Generates RSA-2048 key pair with SHA-256 fingerprint</a:t>
             </a:r>
           </a:p>
@@ -7430,8 +7830,8 @@
         </p:nvSpPr>
         <p:spPr>
           <a:xfrm>
-            <a:off x="4543424" y="3255317"/>
-            <a:ext cx="3105149" cy="1173360"/>
+            <a:off x="4788957" y="3392684"/>
+            <a:ext cx="3105149" cy="615553"/>
           </a:xfrm>
           <a:prstGeom prst="rect">
             <a:avLst/>
@@ -7452,18 +7852,28 @@
               </a:defRPr>
             </a:pPr>
             <a:r>
+              <a:rPr sz="1000"/>
               <a:t>python cli.py encrypt \</a:t>
             </a:r>
-            <a:br/>
-            <a:r>
+            <a:br>
+              <a:rPr sz="1000"/>
+            </a:br>
+            <a:r>
+              <a:rPr sz="1000"/>
               <a:t>  --input  secret.txt \</a:t>
             </a:r>
-            <a:br/>
-            <a:r>
+            <a:br>
+              <a:rPr sz="1000"/>
+            </a:br>
+            <a:r>
+              <a:rPr sz="1000"/>
               <a:t>  --output secret.enc \</a:t>
             </a:r>
-            <a:br/>
-            <a:r>
+            <a:br>
+              <a:rPr sz="1000"/>
+            </a:br>
+            <a:r>
+              <a:rPr sz="1000"/>
               <a:t>  --key    keys/public.pem</a:t>
             </a:r>
           </a:p>
@@ -7478,7 +7888,7 @@
         <p:spPr>
           <a:xfrm>
             <a:off x="4543424" y="4428678"/>
-            <a:ext cx="3105149" cy="483691"/>
+            <a:ext cx="3105149" cy="307777"/>
           </a:xfrm>
           <a:prstGeom prst="rect">
             <a:avLst/>
@@ -7499,6 +7909,7 @@
               </a:defRPr>
             </a:pPr>
             <a:r>
+              <a:rPr sz="1000" dirty="0"/>
               <a:t>Produces encrypted .enc bundle unreadable without private key</a:t>
             </a:r>
           </a:p>
@@ -7547,8 +7958,8 @@
         </p:nvSpPr>
         <p:spPr>
           <a:xfrm>
-            <a:off x="8162924" y="3255317"/>
-            <a:ext cx="3105149" cy="1173360"/>
+            <a:off x="8408457" y="3392684"/>
+            <a:ext cx="3105149" cy="615553"/>
           </a:xfrm>
           <a:prstGeom prst="rect">
             <a:avLst/>
@@ -7569,18 +7980,28 @@
               </a:defRPr>
             </a:pPr>
             <a:r>
+              <a:rPr sz="1000"/>
               <a:t>python cli.py decrypt \</a:t>
             </a:r>
-            <a:br/>
-            <a:r>
+            <a:br>
+              <a:rPr sz="1000"/>
+            </a:br>
+            <a:r>
+              <a:rPr sz="1000"/>
               <a:t>  --input  secret.enc \</a:t>
             </a:r>
-            <a:br/>
-            <a:r>
+            <a:br>
+              <a:rPr sz="1000"/>
+            </a:br>
+            <a:r>
+              <a:rPr sz="1000"/>
               <a:t>  --output recovered.txt \</a:t>
             </a:r>
-            <a:br/>
-            <a:r>
+            <a:br>
+              <a:rPr sz="1000"/>
+            </a:br>
+            <a:r>
+              <a:rPr sz="1000"/>
               <a:t>  --key    keys/private.pem</a:t>
             </a:r>
           </a:p>
@@ -7595,7 +8016,7 @@
         <p:spPr>
           <a:xfrm>
             <a:off x="8162924" y="4428678"/>
-            <a:ext cx="3105149" cy="289470"/>
+            <a:ext cx="3105149" cy="153888"/>
           </a:xfrm>
           <a:prstGeom prst="rect">
             <a:avLst/>
@@ -7616,6 +8037,7 @@
               </a:defRPr>
             </a:pPr>
             <a:r>
+              <a:rPr sz="1000"/>
               <a:t>HMAC verified first; plaintext restored if integrity OK</a:t>
             </a:r>
           </a:p>
@@ -7665,7 +8087,7 @@
 </file>
 
 <file path=ppt/slides/slide8.xml><?xml version="1.0" encoding="utf-8"?>
-<p:sld xmlns:a="http://schemas.openxmlformats.org/drawingml/2006/main" xmlns:p="http://schemas.openxmlformats.org/presentationml/2006/main" xmlns:r="http://schemas.openxmlformats.org/officeDocument/2006/relationships">
+<p:sld xmlns:a="http://schemas.openxmlformats.org/drawingml/2006/main" xmlns:r="http://schemas.openxmlformats.org/officeDocument/2006/relationships" xmlns:p="http://schemas.openxmlformats.org/presentationml/2006/main">
   <p:cSld>
     <p:spTree>
       <p:nvGrpSpPr>
@@ -7673,7 +8095,14 @@
         <p:cNvGrpSpPr/>
         <p:nvPr/>
       </p:nvGrpSpPr>
-      <p:grpSpPr/>
+      <p:grpSpPr>
+        <a:xfrm>
+          <a:off x="0" y="0"/>
+          <a:ext cx="0" cy="0"/>
+          <a:chOff x="0" y="0"/>
+          <a:chExt cx="0" cy="0"/>
+        </a:xfrm>
+      </p:grpSpPr>
       <p:pic>
         <p:nvPicPr>
           <p:cNvPr id="2" name="Picture 1" descr="temp_slide_7.png"/>
@@ -7690,8 +8119,8 @@
         </p:blipFill>
         <p:spPr>
           <a:xfrm>
-            <a:off x="0" y="0"/>
-            <a:ext cx="12191999" cy="6858000"/>
+            <a:off x="0" y="-3388"/>
+            <a:ext cx="12198020" cy="6861387"/>
           </a:xfrm>
           <a:prstGeom prst="rect">
             <a:avLst/>
@@ -7706,7 +8135,7 @@
         </p:nvSpPr>
         <p:spPr>
           <a:xfrm>
-            <a:off x="761999" y="1338857"/>
+            <a:off x="965199" y="1383307"/>
             <a:ext cx="937170" cy="333375"/>
           </a:xfrm>
           <a:prstGeom prst="rect">
@@ -7728,6 +8157,7 @@
               </a:defRPr>
             </a:pPr>
             <a:r>
+              <a:rPr dirty="0"/>
               <a:t>GUI DEMO</a:t>
             </a:r>
           </a:p>
@@ -7847,7 +8277,7 @@
         <p:spPr>
           <a:xfrm>
             <a:off x="1228724" y="3784699"/>
-            <a:ext cx="4438649" cy="335160"/>
+            <a:ext cx="4438649" cy="169277"/>
           </a:xfrm>
           <a:prstGeom prst="rect">
             <a:avLst/>
@@ -7868,6 +8298,7 @@
               </a:defRPr>
             </a:pPr>
             <a:r>
+              <a:rPr sz="1100"/>
               <a:t>Dashboard: Real-time system status</a:t>
             </a:r>
           </a:p>
@@ -7882,7 +8313,7 @@
         <p:spPr>
           <a:xfrm>
             <a:off x="1228724" y="4024610"/>
-            <a:ext cx="4438649" cy="335160"/>
+            <a:ext cx="4438649" cy="169277"/>
           </a:xfrm>
           <a:prstGeom prst="rect">
             <a:avLst/>
@@ -7903,6 +8334,7 @@
               </a:defRPr>
             </a:pPr>
             <a:r>
+              <a:rPr sz="1100"/>
               <a:t>Key Generation: One-click RSA key pairs</a:t>
             </a:r>
           </a:p>
@@ -7917,7 +8349,7 @@
         <p:spPr>
           <a:xfrm>
             <a:off x="1228724" y="4264521"/>
-            <a:ext cx="4438649" cy="335160"/>
+            <a:ext cx="4438649" cy="169277"/>
           </a:xfrm>
           <a:prstGeom prst="rect">
             <a:avLst/>
@@ -7938,6 +8370,7 @@
               </a:defRPr>
             </a:pPr>
             <a:r>
+              <a:rPr sz="1100"/>
               <a:t>File Pickers: Easy browse for files &amp; keys</a:t>
             </a:r>
           </a:p>
@@ -7952,7 +8385,7 @@
         <p:spPr>
           <a:xfrm>
             <a:off x="1228724" y="4504432"/>
-            <a:ext cx="4438649" cy="335160"/>
+            <a:ext cx="4438649" cy="169277"/>
           </a:xfrm>
           <a:prstGeom prst="rect">
             <a:avLst/>
@@ -7973,6 +8406,7 @@
               </a:defRPr>
             </a:pPr>
             <a:r>
+              <a:rPr sz="1100"/>
               <a:t>Live Logging: See background tasks run</a:t>
             </a:r>
           </a:p>
@@ -8021,8 +8455,8 @@
         </p:nvSpPr>
         <p:spPr>
           <a:xfrm>
-            <a:off x="6524624" y="3043832"/>
-            <a:ext cx="4629149" cy="624780"/>
+            <a:off x="6705597" y="3209120"/>
+            <a:ext cx="1747309" cy="169277"/>
           </a:xfrm>
           <a:prstGeom prst="rect">
             <a:avLst/>
@@ -8043,7 +8477,12 @@
               </a:defRPr>
             </a:pPr>
             <a:r>
-              <a:t>dist\HybridCrypto.exe</a:t>
+              <a:rPr sz="1100" dirty="0" err="1"/>
+              <a:t>dist</a:t>
+            </a:r>
+            <a:r>
+              <a:rPr sz="1100" dirty="0"/>
+              <a:t>\HybridCrypto.exe</a:t>
             </a:r>
           </a:p>
         </p:txBody>
@@ -8127,7 +8566,7 @@
         <p:spPr>
           <a:xfrm>
             <a:off x="6524624" y="4860131"/>
-            <a:ext cx="4629149" cy="516135"/>
+            <a:ext cx="4629149" cy="334707"/>
           </a:xfrm>
           <a:prstGeom prst="rect">
             <a:avLst/>
@@ -8148,7 +8587,16 @@
               </a:defRPr>
             </a:pPr>
             <a:r>
-              <a:t>Heavy cryptographic tasks run on background threads, ensuring the UI remains perfectly smooth and responsive.</a:t>
+              <a:rPr dirty="0"/>
+              <a:t>Heavy </a:t>
+            </a:r>
+            <a:r>
+              <a:rPr sz="1200" dirty="0"/>
+              <a:t>cryptographic</a:t>
+            </a:r>
+            <a:r>
+              <a:rPr dirty="0"/>
+              <a:t> tasks run on background threads, ensuring the UI remains perfectly smooth and responsive.</a:t>
             </a:r>
           </a:p>
         </p:txBody>
@@ -8162,7 +8610,7 @@
 </file>
 
 <file path=ppt/slides/slide9.xml><?xml version="1.0" encoding="utf-8"?>
-<p:sld xmlns:a="http://schemas.openxmlformats.org/drawingml/2006/main" xmlns:p="http://schemas.openxmlformats.org/presentationml/2006/main" xmlns:r="http://schemas.openxmlformats.org/officeDocument/2006/relationships">
+<p:sld xmlns:a="http://schemas.openxmlformats.org/drawingml/2006/main" xmlns:r="http://schemas.openxmlformats.org/officeDocument/2006/relationships" xmlns:p="http://schemas.openxmlformats.org/presentationml/2006/main">
   <p:cSld>
     <p:spTree>
       <p:nvGrpSpPr>
@@ -8170,7 +8618,14 @@
         <p:cNvGrpSpPr/>
         <p:nvPr/>
       </p:nvGrpSpPr>
-      <p:grpSpPr/>
+      <p:grpSpPr>
+        <a:xfrm>
+          <a:off x="0" y="0"/>
+          <a:ext cx="0" cy="0"/>
+          <a:chOff x="0" y="0"/>
+          <a:chExt cx="0" cy="0"/>
+        </a:xfrm>
+      </p:grpSpPr>
       <p:pic>
         <p:nvPicPr>
           <p:cNvPr id="2" name="Picture 1" descr="temp_slide_8.png"/>
@@ -8203,7 +8658,7 @@
         </p:nvSpPr>
         <p:spPr>
           <a:xfrm>
-            <a:off x="761999" y="895350"/>
+            <a:off x="975359" y="940594"/>
             <a:ext cx="858142" cy="333375"/>
           </a:xfrm>
           <a:prstGeom prst="rect">
@@ -8225,6 +8680,7 @@
               </a:defRPr>
             </a:pPr>
             <a:r>
+              <a:rPr dirty="0"/>
               <a:t>RESULTS</a:t>
             </a:r>
           </a:p>
@@ -8308,7 +8764,7 @@
         </p:nvSpPr>
         <p:spPr>
           <a:xfrm>
-            <a:off x="1038224" y="2676525"/>
+            <a:off x="1199702" y="2781302"/>
             <a:ext cx="3256359" cy="485775"/>
           </a:xfrm>
           <a:prstGeom prst="rect">
@@ -8330,6 +8786,7 @@
               </a:defRPr>
             </a:pPr>
             <a:r>
+              <a:rPr dirty="0"/>
               <a:t>Test Case</a:t>
             </a:r>
           </a:p>
@@ -8343,7 +8800,7 @@
         </p:nvSpPr>
         <p:spPr>
           <a:xfrm>
-            <a:off x="4294584" y="2676525"/>
+            <a:off x="4456062" y="2781302"/>
             <a:ext cx="1372790" cy="485775"/>
           </a:xfrm>
           <a:prstGeom prst="rect">
@@ -8378,7 +8835,7 @@
         </p:nvSpPr>
         <p:spPr>
           <a:xfrm>
-            <a:off x="1038224" y="3067050"/>
+            <a:off x="1199702" y="3171827"/>
             <a:ext cx="3256359" cy="471487"/>
           </a:xfrm>
           <a:prstGeom prst="rect">
@@ -8413,7 +8870,7 @@
         </p:nvSpPr>
         <p:spPr>
           <a:xfrm>
-            <a:off x="4294584" y="3067050"/>
+            <a:off x="4456062" y="3171827"/>
             <a:ext cx="1372790" cy="471487"/>
           </a:xfrm>
           <a:prstGeom prst="rect">
@@ -8448,7 +8905,7 @@
         </p:nvSpPr>
         <p:spPr>
           <a:xfrm>
-            <a:off x="1038224" y="3443287"/>
+            <a:off x="1199702" y="3548064"/>
             <a:ext cx="3256359" cy="476250"/>
           </a:xfrm>
           <a:prstGeom prst="rect">
@@ -8483,7 +8940,7 @@
         </p:nvSpPr>
         <p:spPr>
           <a:xfrm>
-            <a:off x="4294584" y="3443287"/>
+            <a:off x="4456062" y="3548064"/>
             <a:ext cx="1372790" cy="476250"/>
           </a:xfrm>
           <a:prstGeom prst="rect">
@@ -8518,7 +8975,7 @@
         </p:nvSpPr>
         <p:spPr>
           <a:xfrm>
-            <a:off x="1038224" y="3824287"/>
+            <a:off x="1199702" y="3929064"/>
             <a:ext cx="3256359" cy="476250"/>
           </a:xfrm>
           <a:prstGeom prst="rect">
@@ -8553,7 +9010,7 @@
         </p:nvSpPr>
         <p:spPr>
           <a:xfrm>
-            <a:off x="4294584" y="3824287"/>
+            <a:off x="4456062" y="3929064"/>
             <a:ext cx="1372790" cy="476250"/>
           </a:xfrm>
           <a:prstGeom prst="rect">
@@ -8588,7 +9045,7 @@
         </p:nvSpPr>
         <p:spPr>
           <a:xfrm>
-            <a:off x="1038224" y="4205287"/>
+            <a:off x="1199702" y="4310064"/>
             <a:ext cx="3256359" cy="476250"/>
           </a:xfrm>
           <a:prstGeom prst="rect">
@@ -8623,7 +9080,7 @@
         </p:nvSpPr>
         <p:spPr>
           <a:xfrm>
-            <a:off x="4294584" y="4205287"/>
+            <a:off x="4456062" y="4310064"/>
             <a:ext cx="1372790" cy="476250"/>
           </a:xfrm>
           <a:prstGeom prst="rect">
@@ -8658,7 +9115,7 @@
         </p:nvSpPr>
         <p:spPr>
           <a:xfrm>
-            <a:off x="1038224" y="4586287"/>
+            <a:off x="1199702" y="4691064"/>
             <a:ext cx="3256359" cy="476250"/>
           </a:xfrm>
           <a:prstGeom prst="rect">
@@ -8693,7 +9150,7 @@
         </p:nvSpPr>
         <p:spPr>
           <a:xfrm>
-            <a:off x="4294584" y="4586287"/>
+            <a:off x="4456062" y="4691064"/>
             <a:ext cx="1372790" cy="476250"/>
           </a:xfrm>
           <a:prstGeom prst="rect">
@@ -8728,7 +9185,7 @@
         </p:nvSpPr>
         <p:spPr>
           <a:xfrm>
-            <a:off x="1038224" y="4967287"/>
+            <a:off x="1199702" y="5072064"/>
             <a:ext cx="3256359" cy="476250"/>
           </a:xfrm>
           <a:prstGeom prst="rect">
@@ -8763,7 +9220,7 @@
         </p:nvSpPr>
         <p:spPr>
           <a:xfrm>
-            <a:off x="4294584" y="4967287"/>
+            <a:off x="4456062" y="5072064"/>
             <a:ext cx="1372790" cy="476250"/>
           </a:xfrm>
           <a:prstGeom prst="rect">
@@ -8798,7 +9255,7 @@
         </p:nvSpPr>
         <p:spPr>
           <a:xfrm>
-            <a:off x="1038224" y="5348287"/>
+            <a:off x="1199702" y="5453064"/>
             <a:ext cx="3256359" cy="471487"/>
           </a:xfrm>
           <a:prstGeom prst="rect">
@@ -8833,7 +9290,7 @@
         </p:nvSpPr>
         <p:spPr>
           <a:xfrm>
-            <a:off x="4294584" y="5348287"/>
+            <a:off x="4456062" y="5453064"/>
             <a:ext cx="1372790" cy="471487"/>
           </a:xfrm>
           <a:prstGeom prst="rect">

--- a/slides_editable.pptx
+++ b/slides_editable.pptx
@@ -3246,7 +3246,7 @@
         </p:nvSpPr>
         <p:spPr>
           <a:xfrm>
-            <a:off x="3583463" y="4419026"/>
+            <a:off x="3583463" y="4430931"/>
             <a:ext cx="935235" cy="333375"/>
           </a:xfrm>
           <a:prstGeom prst="rect">
@@ -3282,7 +3282,7 @@
         </p:nvSpPr>
         <p:spPr>
           <a:xfrm>
-            <a:off x="4652876" y="4431082"/>
+            <a:off x="4652876" y="4433981"/>
             <a:ext cx="1178867" cy="333375"/>
           </a:xfrm>
           <a:prstGeom prst="rect">
@@ -3340,6 +3340,7 @@
               </a:defRPr>
             </a:pPr>
             <a:r>
+              <a:rPr dirty="0"/>
               <a:t>HMAC-SHA256</a:t>
             </a:r>
           </a:p>
@@ -3389,8 +3390,8 @@
         </p:nvSpPr>
         <p:spPr>
           <a:xfrm>
-            <a:off x="3141420" y="5410497"/>
-            <a:ext cx="5424338" cy="338137"/>
+            <a:off x="3012486" y="5410464"/>
+            <a:ext cx="5638513" cy="215444"/>
           </a:xfrm>
           <a:prstGeom prst="rect">
             <a:avLst/>
@@ -3411,7 +3412,24 @@
               </a:defRPr>
             </a:pPr>
             <a:r>
-              <a:t>Presented by: Waqas Ul Hasan (FA23-BCS-167) &amp; Qurat Ul ain (FA23-BCS-195)</a:t>
+              <a:rPr sz="1400" dirty="0"/>
+              <a:t>Presented by: Waqas Ul Hasan (FA23-BCS-167) &amp; </a:t>
+            </a:r>
+            <a:r>
+              <a:rPr sz="1400" dirty="0" err="1"/>
+              <a:t>Qurat</a:t>
+            </a:r>
+            <a:r>
+              <a:rPr sz="1400" dirty="0"/>
+              <a:t> Ul </a:t>
+            </a:r>
+            <a:r>
+              <a:rPr sz="1400" dirty="0" err="1"/>
+              <a:t>ain</a:t>
+            </a:r>
+            <a:r>
+              <a:rPr sz="1400" dirty="0"/>
+              <a:t> (FA23-BCS-195)</a:t>
             </a:r>
           </a:p>
         </p:txBody>
@@ -4634,7 +4652,7 @@
         <p:spPr>
           <a:xfrm>
             <a:off x="1038224" y="5107632"/>
-            <a:ext cx="10115549" cy="354210"/>
+            <a:ext cx="10115549" cy="215444"/>
           </a:xfrm>
           <a:prstGeom prst="rect">
             <a:avLst/>
@@ -4655,7 +4673,7 @@
               </a:defRPr>
             </a:pPr>
             <a:r>
-              <a:rPr dirty="0"/>
+              <a:rPr sz="1400" dirty="0"/>
               <a:t>Solution: Combine symmetric speed with asymmetric security — Hybrid Cryptography</a:t>
             </a:r>
           </a:p>
